--- a/Rapport_Formation_Emploi_Togo.pptx
+++ b/Rapport_Formation_Emploi_Togo.pptx
@@ -4,6 +4,9 @@
   <p:sldMasterIdLst>
     <p:sldMasterId id="2147483648" r:id="rId1"/>
   </p:sldMasterIdLst>
+  <p:notesMasterIdLst>
+    <p:notesMasterId r:id="rId12"/>
+  </p:notesMasterIdLst>
   <p:sldIdLst>
     <p:sldId id="256" r:id="rId2"/>
     <p:sldId id="257" r:id="rId3"/>
@@ -16,9 +19,6 @@
     <p:sldId id="264" r:id="rId10"/>
     <p:sldId id="265" r:id="rId11"/>
   </p:sldIdLst>
-  <p:notesMasterIdLst>
-    <p:notesMasterId r:id="rId12"/>
-  </p:notesMasterIdLst>
   <p:sldSz cx="12192000" cy="6858000"/>
   <p:notesSz cx="6858000" cy="12192000"/>
   <p:defaultTextStyle>
@@ -113,489 +113,12 @@
       </a:defRPr>
     </a:lvl9pPr>
   </p:defaultTextStyle>
+  <p:extLst>
+    <p:ext uri="{EFAFB233-063F-42B5-8137-9DF3F51BA10A}">
+      <p15:sldGuideLst xmlns:p15="http://schemas.microsoft.com/office/powerpoint/2012/main"/>
+    </p:ext>
+  </p:extLst>
 </p:presentation>
-</file>
-
-<file path=ppt/charts/chart1.xml><?xml version="1.0" encoding="utf-8"?>
-<c:chartSpace xmlns:c="http://schemas.openxmlformats.org/drawingml/2006/chart" xmlns:a="http://schemas.openxmlformats.org/drawingml/2006/main" xmlns:r="http://schemas.openxmlformats.org/officeDocument/2006/relationships">
-  <c:date1904 val="0"/>
-  <c:roundedCorners val="1"/>
-  <c:chart>
-    <c:autoTitleDeleted val="1"/>
-    <c:plotArea>
-      <c:layout/>
-      <c:barChart>
-        <c:barDir val="col"/>
-        <c:grouping val="clustered"/>
-        <c:varyColors val="0"/>
-        <c:ser>
-          <c:idx val="0"/>
-          <c:order val="0"/>
-          <c:tx>
-            <c:strRef>
-              <c:f>Sheet1!$B$1</c:f>
-              <c:strCache>
-                <c:ptCount val="1"/>
-                <c:pt idx="0">
-                  <c:v>Établissements</c:v>
-                </c:pt>
-              </c:strCache>
-            </c:strRef>
-          </c:tx>
-          <c:spPr>
-            <a:solidFill>
-              <a:srgbClr val="0B3D66"/>
-            </a:solidFill>
-            <a:effectLst/>
-          </c:spPr>
-          <c:invertIfNegative val="0"/>
-          <c:dLbls>
-            <c:numFmt formatCode="#,##0" sourceLinked="0"/>
-            <c:txPr>
-              <a:bodyPr/>
-              <a:lstStyle/>
-              <a:p>
-                <a:pPr>
-                  <a:defRPr b="0" i="0" strike="noStrike" sz="1000" u="none">
-                    <a:solidFill>
-                      <a:srgbClr val="0B1F33"/>
-                    </a:solidFill>
-                    <a:latin typeface="Arial"/>
-                  </a:defRPr>
-                </a:pPr>
-              </a:p>
-            </c:txPr>
-            <c:showLegendKey val="0"/>
-            <c:showVal val="1"/>
-            <c:showCatName val="0"/>
-            <c:showSerName val="0"/>
-            <c:showPercent val="0"/>
-            <c:showBubbleSize val="0"/>
-            <c:showLeaderLines val="0"/>
-          </c:dLbls>
-          <c:cat>
-            <c:multiLvlStrRef>
-              <c:f>Sheet1!$A$2:$A$6</c:f>
-              <c:multiLvlStrCache>
-                <c:ptCount val="5"/>
-                <c:lvl>
-                  <c:pt idx="0">
-                    <c:v>Maritime</c:v>
-                  </c:pt>
-                  <c:pt idx="1">
-                    <c:v>Kara</c:v>
-                  </c:pt>
-                  <c:pt idx="2">
-                    <c:v>Centrale</c:v>
-                  </c:pt>
-                  <c:pt idx="3">
-                    <c:v>Plateaux</c:v>
-                  </c:pt>
-                  <c:pt idx="4">
-                    <c:v>Savanes</c:v>
-                  </c:pt>
-                </c:lvl>
-              </c:multiLvlStrCache>
-            </c:multiLvlStrRef>
-          </c:cat>
-          <c:val>
-            <c:numRef>
-              <c:f>Sheet1!$B$2:$B$6</c:f>
-              <c:numCache>
-                <c:formatCode>General</c:formatCode>
-                <c:ptCount val="5"/>
-                <c:pt idx="0">
-                  <c:v>154</c:v>
-                </c:pt>
-                <c:pt idx="1">
-                  <c:v>37</c:v>
-                </c:pt>
-                <c:pt idx="2">
-                  <c:v>20</c:v>
-                </c:pt>
-                <c:pt idx="3">
-                  <c:v>37</c:v>
-                </c:pt>
-                <c:pt idx="4">
-                  <c:v>8</c:v>
-                </c:pt>
-              </c:numCache>
-            </c:numRef>
-          </c:val>
-        </c:ser>
-        <c:dLbls>
-          <c:numFmt formatCode="#,##0" sourceLinked="0"/>
-          <c:txPr>
-            <a:bodyPr/>
-            <a:lstStyle/>
-            <a:p>
-              <a:pPr>
-                <a:defRPr b="0" i="0" strike="noStrike" sz="1000" u="none">
-                  <a:solidFill>
-                    <a:srgbClr val="0B1F33"/>
-                  </a:solidFill>
-                  <a:latin typeface="Arial"/>
-                </a:defRPr>
-              </a:pPr>
-            </a:p>
-          </c:txPr>
-          <c:showLegendKey val="0"/>
-          <c:showVal val="1"/>
-          <c:showCatName val="0"/>
-          <c:showSerName val="0"/>
-          <c:showPercent val="0"/>
-          <c:showBubbleSize val="0"/>
-          <c:showLeaderLines val="0"/>
-        </c:dLbls>
-        <c:gapWidth val="35"/>
-        <c:overlap val="0"/>
-        <c:axId val="2094734554"/>
-        <c:axId val="2094734552"/>
-        <c:axId val="2094734556"/>
-      </c:barChart>
-      <c:catAx>
-        <c:axId val="2094734554"/>
-        <c:scaling>
-          <c:orientation val="minMax"/>
-        </c:scaling>
-        <c:delete val="0"/>
-        <c:axPos val="b"/>
-        <c:numFmt formatCode="General" sourceLinked="1"/>
-        <c:majorTickMark val="out"/>
-        <c:minorTickMark val="none"/>
-        <c:tickLblPos val="low"/>
-        <c:spPr>
-          <a:ln w="12700" cap="flat">
-            <a:solidFill>
-              <a:srgbClr val="888888"/>
-            </a:solidFill>
-            <a:prstDash val="solid"/>
-            <a:round/>
-          </a:ln>
-        </c:spPr>
-        <c:txPr>
-          <a:bodyPr/>
-          <a:lstStyle/>
-          <a:p>
-            <a:pPr>
-              <a:defRPr sz="1200" b="0" i="0" u="none" strike="noStrike">
-                <a:solidFill>
-                  <a:srgbClr val="64748B"/>
-                </a:solidFill>
-                <a:latin typeface="Arial"/>
-              </a:defRPr>
-            </a:pPr>
-            <a:endParaRPr lang="en-US"/>
-          </a:p>
-        </c:txPr>
-        <c:crossAx val="2094734552"/>
-        <c:crosses val="autoZero"/>
-        <c:auto val="1"/>
-        <c:lblAlgn val="ctr"/>
-        <c:noMultiLvlLbl val="1"/>
-      </c:catAx>
-      <c:valAx>
-        <c:axId val="2094734552"/>
-        <c:scaling>
-          <c:orientation val="minMax"/>
-        </c:scaling>
-        <c:delete val="1"/>
-        <c:axPos val="l"/>
-        <c:numFmt formatCode="General" sourceLinked="0"/>
-        <c:majorTickMark val="out"/>
-        <c:minorTickMark val="none"/>
-        <c:tickLblPos val="nextTo"/>
-        <c:spPr>
-          <a:ln w="12700" cap="flat">
-            <a:solidFill>
-              <a:srgbClr val="888888"/>
-            </a:solidFill>
-            <a:prstDash val="solid"/>
-            <a:round/>
-          </a:ln>
-        </c:spPr>
-        <c:txPr>
-          <a:bodyPr/>
-          <a:lstStyle/>
-          <a:p>
-            <a:pPr>
-              <a:defRPr sz="1200" b="0" i="0" u="none" strike="noStrike">
-                <a:solidFill>
-                  <a:srgbClr val="64748B"/>
-                </a:solidFill>
-                <a:latin typeface="Arial"/>
-              </a:defRPr>
-            </a:pPr>
-            <a:endParaRPr lang="en-US"/>
-          </a:p>
-        </c:txPr>
-        <c:crossAx val="2094734554"/>
-        <c:crosses val="autoZero"/>
-        <c:crossBetween val="between"/>
-      </c:valAx>
-      <c:spPr>
-        <a:noFill/>
-        <a:ln>
-          <a:noFill/>
-        </a:ln>
-        <a:effectLst/>
-      </c:spPr>
-    </c:plotArea>
-    <c:plotVisOnly val="1"/>
-    <c:dispBlanksAs val="span"/>
-  </c:chart>
-  <c:spPr>
-    <a:noFill/>
-    <a:ln>
-      <a:noFill/>
-    </a:ln>
-    <a:effectLst/>
-  </c:spPr>
-  <c:externalData r:id="rId1">
-    <c:autoUpdate val="0"/>
-  </c:externalData>
-</c:chartSpace>
-</file>
-
-<file path=ppt/charts/chart2.xml><?xml version="1.0" encoding="utf-8"?>
-<c:chartSpace xmlns:c="http://schemas.openxmlformats.org/drawingml/2006/chart" xmlns:a="http://schemas.openxmlformats.org/drawingml/2006/main" xmlns:r="http://schemas.openxmlformats.org/officeDocument/2006/relationships">
-  <c:date1904 val="0"/>
-  <c:roundedCorners val="1"/>
-  <c:chart>
-    <c:autoTitleDeleted val="1"/>
-    <c:plotArea>
-      <c:layout/>
-      <c:barChart>
-        <c:barDir val="col"/>
-        <c:grouping val="clustered"/>
-        <c:varyColors val="0"/>
-        <c:ser>
-          <c:idx val="0"/>
-          <c:order val="0"/>
-          <c:tx>
-            <c:strRef>
-              <c:f>Sheet1!$B$1</c:f>
-              <c:strCache>
-                <c:ptCount val="1"/>
-                <c:pt idx="0">
-                  <c:v>FEAS</c:v>
-                </c:pt>
-              </c:strCache>
-            </c:strRef>
-          </c:tx>
-          <c:spPr>
-            <a:solidFill>
-              <a:srgbClr val="17A2B8"/>
-            </a:solidFill>
-            <a:effectLst/>
-          </c:spPr>
-          <c:invertIfNegative val="0"/>
-          <c:dLbls>
-            <c:numFmt formatCode="#,##0" sourceLinked="0"/>
-            <c:txPr>
-              <a:bodyPr/>
-              <a:lstStyle/>
-              <a:p>
-                <a:pPr>
-                  <a:defRPr b="0" i="0" strike="noStrike" sz="1000" u="none">
-                    <a:solidFill>
-                      <a:srgbClr val="0B1F33"/>
-                    </a:solidFill>
-                    <a:latin typeface="Arial"/>
-                  </a:defRPr>
-                </a:pPr>
-              </a:p>
-            </c:txPr>
-            <c:showLegendKey val="0"/>
-            <c:showVal val="1"/>
-            <c:showCatName val="0"/>
-            <c:showSerName val="0"/>
-            <c:showPercent val="0"/>
-            <c:showBubbleSize val="0"/>
-            <c:showLeaderLines val="0"/>
-          </c:dLbls>
-          <c:cat>
-            <c:multiLvlStrRef>
-              <c:f>Sheet1!$A$2:$A$6</c:f>
-              <c:multiLvlStrCache>
-                <c:ptCount val="5"/>
-                <c:lvl>
-                  <c:pt idx="0">
-                    <c:v>Maritime</c:v>
-                  </c:pt>
-                  <c:pt idx="1">
-                    <c:v>Kara</c:v>
-                  </c:pt>
-                  <c:pt idx="2">
-                    <c:v>Centrale</c:v>
-                  </c:pt>
-                  <c:pt idx="3">
-                    <c:v>Plateaux</c:v>
-                  </c:pt>
-                  <c:pt idx="4">
-                    <c:v>Savanes</c:v>
-                  </c:pt>
-                </c:lvl>
-              </c:multiLvlStrCache>
-            </c:multiLvlStrRef>
-          </c:cat>
-          <c:val>
-            <c:numRef>
-              <c:f>Sheet1!$B$2:$B$6</c:f>
-              <c:numCache>
-                <c:formatCode>General</c:formatCode>
-                <c:ptCount val="5"/>
-                <c:pt idx="0">
-                  <c:v>81.7</c:v>
-                </c:pt>
-                <c:pt idx="1">
-                  <c:v>61.3</c:v>
-                </c:pt>
-                <c:pt idx="2">
-                  <c:v>40.1</c:v>
-                </c:pt>
-                <c:pt idx="3">
-                  <c:v>36.7</c:v>
-                </c:pt>
-                <c:pt idx="4">
-                  <c:v>31.3</c:v>
-                </c:pt>
-              </c:numCache>
-            </c:numRef>
-          </c:val>
-        </c:ser>
-        <c:dLbls>
-          <c:numFmt formatCode="#,##0" sourceLinked="0"/>
-          <c:txPr>
-            <a:bodyPr/>
-            <a:lstStyle/>
-            <a:p>
-              <a:pPr>
-                <a:defRPr b="0" i="0" strike="noStrike" sz="1000" u="none">
-                  <a:solidFill>
-                    <a:srgbClr val="0B1F33"/>
-                  </a:solidFill>
-                  <a:latin typeface="Arial"/>
-                </a:defRPr>
-              </a:pPr>
-            </a:p>
-          </c:txPr>
-          <c:showLegendKey val="0"/>
-          <c:showVal val="1"/>
-          <c:showCatName val="0"/>
-          <c:showSerName val="0"/>
-          <c:showPercent val="0"/>
-          <c:showBubbleSize val="0"/>
-          <c:showLeaderLines val="0"/>
-        </c:dLbls>
-        <c:gapWidth val="35"/>
-        <c:overlap val="0"/>
-        <c:axId val="2094734554"/>
-        <c:axId val="2094734552"/>
-        <c:axId val="2094734556"/>
-      </c:barChart>
-      <c:catAx>
-        <c:axId val="2094734554"/>
-        <c:scaling>
-          <c:orientation val="minMax"/>
-        </c:scaling>
-        <c:delete val="0"/>
-        <c:axPos val="b"/>
-        <c:numFmt formatCode="General" sourceLinked="1"/>
-        <c:majorTickMark val="out"/>
-        <c:minorTickMark val="none"/>
-        <c:tickLblPos val="low"/>
-        <c:spPr>
-          <a:ln w="12700" cap="flat">
-            <a:solidFill>
-              <a:srgbClr val="888888"/>
-            </a:solidFill>
-            <a:prstDash val="solid"/>
-            <a:round/>
-          </a:ln>
-        </c:spPr>
-        <c:txPr>
-          <a:bodyPr/>
-          <a:lstStyle/>
-          <a:p>
-            <a:pPr>
-              <a:defRPr sz="1200" b="0" i="0" u="none" strike="noStrike">
-                <a:solidFill>
-                  <a:srgbClr val="64748B"/>
-                </a:solidFill>
-                <a:latin typeface="Arial"/>
-              </a:defRPr>
-            </a:pPr>
-            <a:endParaRPr lang="en-US"/>
-          </a:p>
-        </c:txPr>
-        <c:crossAx val="2094734552"/>
-        <c:crosses val="autoZero"/>
-        <c:auto val="1"/>
-        <c:lblAlgn val="ctr"/>
-        <c:noMultiLvlLbl val="1"/>
-      </c:catAx>
-      <c:valAx>
-        <c:axId val="2094734552"/>
-        <c:scaling>
-          <c:orientation val="minMax"/>
-        </c:scaling>
-        <c:delete val="1"/>
-        <c:axPos val="l"/>
-        <c:numFmt formatCode="General" sourceLinked="0"/>
-        <c:majorTickMark val="out"/>
-        <c:minorTickMark val="none"/>
-        <c:tickLblPos val="nextTo"/>
-        <c:spPr>
-          <a:ln w="12700" cap="flat">
-            <a:solidFill>
-              <a:srgbClr val="888888"/>
-            </a:solidFill>
-            <a:prstDash val="solid"/>
-            <a:round/>
-          </a:ln>
-        </c:spPr>
-        <c:txPr>
-          <a:bodyPr/>
-          <a:lstStyle/>
-          <a:p>
-            <a:pPr>
-              <a:defRPr sz="1200" b="0" i="0" u="none" strike="noStrike">
-                <a:solidFill>
-                  <a:srgbClr val="64748B"/>
-                </a:solidFill>
-                <a:latin typeface="Arial"/>
-              </a:defRPr>
-            </a:pPr>
-            <a:endParaRPr lang="en-US"/>
-          </a:p>
-        </c:txPr>
-        <c:crossAx val="2094734554"/>
-        <c:crosses val="autoZero"/>
-        <c:crossBetween val="between"/>
-      </c:valAx>
-      <c:spPr>
-        <a:noFill/>
-        <a:ln>
-          <a:noFill/>
-        </a:ln>
-        <a:effectLst/>
-      </c:spPr>
-    </c:plotArea>
-    <c:plotVisOnly val="1"/>
-    <c:dispBlanksAs val="span"/>
-  </c:chart>
-  <c:spPr>
-    <a:noFill/>
-    <a:ln>
-      <a:noFill/>
-    </a:ln>
-    <a:effectLst/>
-  </c:spPr>
-  <c:externalData r:id="rId1">
-    <c:autoUpdate val="0"/>
-  </c:externalData>
-</c:chartSpace>
 </file>
 
 <file path=ppt/notesMasters/notesMaster1.xml><?xml version="1.0" encoding="utf-8"?>
@@ -620,234 +143,10 @@
           <a:chExt cx="0" cy="0"/>
         </a:xfrm>
       </p:grpSpPr>
-      <p:sp>
-        <p:nvSpPr>
-          <p:cNvPr id="2" name="Header Placeholder 1"/>
-          <p:cNvSpPr>
-            <a:spLocks noGrp="1"/>
-          </p:cNvSpPr>
-          <p:nvPr>
-            <p:ph type="hdr" sz="quarter"/>
-          </p:nvPr>
-        </p:nvSpPr>
-        <p:spPr>
-          <a:xfrm>
-            <a:off x="0" y="0"/>
-            <a:ext cx="2971800" cy="458788"/>
-          </a:xfrm>
-          <a:prstGeom prst="rect">
-            <a:avLst/>
-          </a:prstGeom>
-        </p:spPr>
-        <p:txBody>
-          <a:bodyPr vert="horz" lIns="91440" tIns="45720" rIns="91440" bIns="45720" rtlCol="0"/>
-          <a:lstStyle>
-            <a:lvl1pPr algn="l">
-              <a:defRPr sz="1200"/>
-            </a:lvl1pPr>
-          </a:lstStyle>
-          <a:p>
-            <a:endParaRPr lang="en-US"/>
-          </a:p>
-        </p:txBody>
-      </p:sp>
-      <p:sp>
-        <p:nvSpPr>
-          <p:cNvPr id="3" name="Date Placeholder 2"/>
-          <p:cNvSpPr>
-            <a:spLocks noGrp="1"/>
-          </p:cNvSpPr>
-          <p:nvPr>
-            <p:ph type="dt" idx="1"/>
-          </p:nvPr>
-        </p:nvSpPr>
-        <p:spPr>
-          <a:xfrm>
-            <a:off x="3884613" y="0"/>
-            <a:ext cx="2971800" cy="458788"/>
-          </a:xfrm>
-          <a:prstGeom prst="rect">
-            <a:avLst/>
-          </a:prstGeom>
-        </p:spPr>
-        <p:txBody>
-          <a:bodyPr vert="horz" lIns="91440" tIns="45720" rIns="91440" bIns="45720" rtlCol="0"/>
-          <a:lstStyle>
-            <a:lvl1pPr algn="r">
-              <a:defRPr sz="1200"/>
-            </a:lvl1pPr>
-          </a:lstStyle>
-          <a:p>
-            <a:fld id="{5282F153-3F37-0F45-9E97-73ACFA13230C}" type="datetimeFigureOut">
-              <a:rPr lang="en-US"/>
-              <a:t>7/23/19</a:t>
-            </a:fld>
-            <a:endParaRPr lang="en-US"/>
-          </a:p>
-        </p:txBody>
-      </p:sp>
-      <p:sp>
-        <p:nvSpPr>
-          <p:cNvPr id="4" name="Slide Image Placeholder 3"/>
-          <p:cNvSpPr>
-            <a:spLocks noGrp="1" noRot="1" noChangeAspect="1"/>
-          </p:cNvSpPr>
-          <p:nvPr>
-            <p:ph type="sldImg" idx="2"/>
-          </p:nvPr>
-        </p:nvSpPr>
-        <p:spPr>
-          <a:xfrm>
-            <a:off x="685800" y="1143000"/>
-            <a:ext cx="5486400" cy="3086100"/>
-          </a:xfrm>
-          <a:prstGeom prst="rect">
-            <a:avLst/>
-          </a:prstGeom>
-          <a:noFill/>
-          <a:ln w="12700">
-            <a:solidFill>
-              <a:prstClr val="black"/>
-            </a:solidFill>
-          </a:ln>
-        </p:spPr>
-        <p:txBody>
-          <a:bodyPr vert="horz" lIns="91440" tIns="45720" rIns="91440" bIns="45720" rtlCol="0" anchor="ctr"/>
-          <a:lstStyle/>
-          <a:p>
-            <a:endParaRPr lang="en-US"/>
-          </a:p>
-        </p:txBody>
-      </p:sp>
-      <p:sp>
-        <p:nvSpPr>
-          <p:cNvPr id="5" name="Notes Placeholder 4"/>
-          <p:cNvSpPr>
-            <a:spLocks noGrp="1"/>
-          </p:cNvSpPr>
-          <p:nvPr>
-            <p:ph type="body" sz="quarter" idx="3"/>
-          </p:nvPr>
-        </p:nvSpPr>
-        <p:spPr>
-          <a:xfrm>
-            <a:off x="685800" y="4400550"/>
-            <a:ext cx="5486400" cy="3600450"/>
-          </a:xfrm>
-          <a:prstGeom prst="rect">
-            <a:avLst/>
-          </a:prstGeom>
-        </p:spPr>
-        <p:txBody>
-          <a:bodyPr vert="horz" lIns="91440" tIns="45720" rIns="91440" bIns="45720" rtlCol="0"/>
-          <a:lstStyle/>
-          <a:p>
-            <a:pPr lvl="0"/>
-            <a:r>
-              <a:rPr lang="en-US"/>
-              <a:t>Click to edit Master text styles</a:t>
-            </a:r>
-          </a:p>
-          <a:p>
-            <a:pPr lvl="1"/>
-            <a:r>
-              <a:rPr lang="en-US"/>
-              <a:t>Second level</a:t>
-            </a:r>
-          </a:p>
-          <a:p>
-            <a:pPr lvl="2"/>
-            <a:r>
-              <a:rPr lang="en-US"/>
-              <a:t>Third level</a:t>
-            </a:r>
-          </a:p>
-          <a:p>
-            <a:pPr lvl="3"/>
-            <a:r>
-              <a:rPr lang="en-US"/>
-              <a:t>Fourth level</a:t>
-            </a:r>
-          </a:p>
-          <a:p>
-            <a:pPr lvl="4"/>
-            <a:r>
-              <a:rPr lang="en-US"/>
-              <a:t>Fifth level</a:t>
-            </a:r>
-          </a:p>
-        </p:txBody>
-      </p:sp>
-      <p:sp>
-        <p:nvSpPr>
-          <p:cNvPr id="6" name="Footer Placeholder 5"/>
-          <p:cNvSpPr>
-            <a:spLocks noGrp="1"/>
-          </p:cNvSpPr>
-          <p:nvPr>
-            <p:ph type="ftr" sz="quarter" idx="4"/>
-          </p:nvPr>
-        </p:nvSpPr>
-        <p:spPr>
-          <a:xfrm>
-            <a:off x="0" y="8685213"/>
-            <a:ext cx="2971800" cy="458787"/>
-          </a:xfrm>
-          <a:prstGeom prst="rect">
-            <a:avLst/>
-          </a:prstGeom>
-        </p:spPr>
-        <p:txBody>
-          <a:bodyPr vert="horz" lIns="91440" tIns="45720" rIns="91440" bIns="45720" rtlCol="0" anchor="b"/>
-          <a:lstStyle>
-            <a:lvl1pPr algn="l">
-              <a:defRPr sz="1200"/>
-            </a:lvl1pPr>
-          </a:lstStyle>
-          <a:p>
-            <a:endParaRPr lang="en-US"/>
-          </a:p>
-        </p:txBody>
-      </p:sp>
-      <p:sp>
-        <p:nvSpPr>
-          <p:cNvPr id="7" name="Slide Number Placeholder 6"/>
-          <p:cNvSpPr>
-            <a:spLocks noGrp="1"/>
-          </p:cNvSpPr>
-          <p:nvPr>
-            <p:ph type="sldNum" sz="quarter" idx="5"/>
-          </p:nvPr>
-        </p:nvSpPr>
-        <p:spPr>
-          <a:xfrm>
-            <a:off x="3884613" y="8685213"/>
-            <a:ext cx="2971800" cy="458787"/>
-          </a:xfrm>
-          <a:prstGeom prst="rect">
-            <a:avLst/>
-          </a:prstGeom>
-        </p:spPr>
-        <p:txBody>
-          <a:bodyPr vert="horz" lIns="91440" tIns="45720" rIns="91440" bIns="45720" rtlCol="0" anchor="b"/>
-          <a:lstStyle>
-            <a:lvl1pPr algn="r">
-              <a:defRPr sz="1200"/>
-            </a:lvl1pPr>
-          </a:lstStyle>
-          <a:p>
-            <a:fld id="{CE5E9CC1-C706-0F49-92D6-E571CC5EEA8F}" type="slidenum">
-              <a:rPr lang="en-US"/>
-              <a:t>‹#›</a:t>
-            </a:fld>
-            <a:endParaRPr lang="en-US"/>
-          </a:p>
-        </p:txBody>
-      </p:sp>
     </p:spTree>
     <p:extLst>
       <p:ext uri="{BB962C8B-B14F-4D97-AF65-F5344CB8AC3E}">
-        <p14:creationId xmlns:p14="http://schemas.microsoft.com/office/powerpoint/2010/main" val="1024086991"/>
+        <p14:creationId xmlns:p14="http://schemas.microsoft.com/office/powerpoint/2010/main" val="2271585336"/>
       </p:ext>
     </p:extLst>
   </p:cSld>
@@ -991,10 +290,6 @@
           <a:bodyPr/>
           <a:lstStyle/>
           <a:p>
-            <a:r>
-              <a:rPr lang="en-US" dirty="0"/>
-              <a:t/>
-            </a:r>
             <a:endParaRPr lang="en-US" dirty="0"/>
           </a:p>
         </p:txBody>
@@ -1079,10 +374,6 @@
           <a:bodyPr/>
           <a:lstStyle/>
           <a:p>
-            <a:r>
-              <a:rPr lang="en-US" dirty="0"/>
-              <a:t/>
-            </a:r>
             <a:endParaRPr lang="en-US" dirty="0"/>
           </a:p>
         </p:txBody>
@@ -1167,10 +458,6 @@
           <a:bodyPr/>
           <a:lstStyle/>
           <a:p>
-            <a:r>
-              <a:rPr lang="en-US" dirty="0"/>
-              <a:t/>
-            </a:r>
             <a:endParaRPr lang="en-US" dirty="0"/>
           </a:p>
         </p:txBody>
@@ -1255,10 +542,6 @@
           <a:bodyPr/>
           <a:lstStyle/>
           <a:p>
-            <a:r>
-              <a:rPr lang="en-US" dirty="0"/>
-              <a:t/>
-            </a:r>
             <a:endParaRPr lang="en-US" dirty="0"/>
           </a:p>
         </p:txBody>
@@ -1343,10 +626,6 @@
           <a:bodyPr/>
           <a:lstStyle/>
           <a:p>
-            <a:r>
-              <a:rPr lang="en-US" dirty="0"/>
-              <a:t/>
-            </a:r>
             <a:endParaRPr lang="en-US" dirty="0"/>
           </a:p>
         </p:txBody>
@@ -1431,10 +710,6 @@
           <a:bodyPr/>
           <a:lstStyle/>
           <a:p>
-            <a:r>
-              <a:rPr lang="en-US" dirty="0"/>
-              <a:t/>
-            </a:r>
             <a:endParaRPr lang="en-US" dirty="0"/>
           </a:p>
         </p:txBody>
@@ -1519,10 +794,6 @@
           <a:bodyPr/>
           <a:lstStyle/>
           <a:p>
-            <a:r>
-              <a:rPr lang="en-US" dirty="0"/>
-              <a:t/>
-            </a:r>
             <a:endParaRPr lang="en-US" dirty="0"/>
           </a:p>
         </p:txBody>
@@ -1607,10 +878,6 @@
           <a:bodyPr/>
           <a:lstStyle/>
           <a:p>
-            <a:r>
-              <a:rPr lang="en-US" dirty="0"/>
-              <a:t/>
-            </a:r>
             <a:endParaRPr lang="en-US" dirty="0"/>
           </a:p>
         </p:txBody>
@@ -1695,10 +962,6 @@
           <a:bodyPr/>
           <a:lstStyle/>
           <a:p>
-            <a:r>
-              <a:rPr lang="en-US" dirty="0"/>
-              <a:t/>
-            </a:r>
             <a:endParaRPr lang="en-US" dirty="0"/>
           </a:p>
         </p:txBody>
@@ -1783,10 +1046,6 @@
           <a:bodyPr/>
           <a:lstStyle/>
           <a:p>
-            <a:r>
-              <a:rPr lang="en-US" dirty="0"/>
-              <a:t/>
-            </a:r>
             <a:endParaRPr lang="en-US" dirty="0"/>
           </a:p>
         </p:txBody>
@@ -1865,6 +1124,7 @@
         <a:solidFill>
           <a:srgbClr val="FFFFFF"/>
         </a:solidFill>
+        <a:effectLst/>
       </p:bgPr>
     </p:bg>
     <p:spTree>
@@ -1922,11 +1182,11 @@
           <a:bodyPr wrap="square" rtlCol="0" anchor="ctr"/>
           <a:lstStyle/>
           <a:p>
-            <a:pPr indent="0" marL="0">
-              <a:buNone/>
-            </a:pPr>
-            <a:r>
-              <a:rPr lang="en-US" sz="1200" b="1" spc="200" kern="0" dirty="0">
+            <a:pPr marL="0" indent="0">
+              <a:buNone/>
+            </a:pPr>
+            <a:r>
+              <a:rPr lang="en-US" sz="1200" b="1" kern="0" spc="200" dirty="0">
                 <a:solidFill>
                   <a:srgbClr val="BFD8EA"/>
                 </a:solidFill>
@@ -1961,7 +1221,7 @@
           <a:bodyPr wrap="square" rtlCol="0" anchor="ctr"/>
           <a:lstStyle/>
           <a:p>
-            <a:pPr algn="r" indent="0" marL="0">
+            <a:pPr marL="0" indent="0" algn="r">
               <a:buNone/>
             </a:pPr>
             <a:r>
@@ -1990,6 +1250,11 @@
 <file path=ppt/slideMasters/slideMaster1.xml><?xml version="1.0" encoding="utf-8"?>
 <p:sldMaster xmlns:a="http://schemas.openxmlformats.org/drawingml/2006/main" xmlns:r="http://schemas.openxmlformats.org/officeDocument/2006/relationships" xmlns:p="http://schemas.openxmlformats.org/presentationml/2006/main">
   <p:cSld>
+    <p:bg>
+      <p:bgRef idx="1001">
+        <a:schemeClr val="bg1"/>
+      </p:bgRef>
+    </p:bg>
     <p:spTree>
       <p:nvGrpSpPr>
         <p:cNvPr id="1" name=""/>
@@ -2273,6 +1538,7 @@
         <a:solidFill>
           <a:srgbClr val="082C4A"/>
         </a:solidFill>
+        <a:effectLst/>
       </p:bgPr>
     </p:bg>
     <p:spTree>
@@ -2351,55 +1617,7 @@
       </p:sp>
       <p:pic>
         <p:nvPicPr>
-          <p:cNvPr id="5" name="Image 0" descr="ministere_education_nationale.jpg">    </p:cNvPr>
-          <p:cNvPicPr>
-            <a:picLocks noChangeAspect="1"/>
-          </p:cNvPicPr>
-          <p:nvPr/>
-        </p:nvPicPr>
-        <p:blipFill>
-          <a:blip r:embed="rId1"/>
-          <a:stretch>
-            <a:fillRect/>
-          </a:stretch>
-        </p:blipFill>
-        <p:spPr>
-          <a:xfrm>
-            <a:off x="502920" y="502920"/>
-            <a:ext cx="777240" cy="777240"/>
-          </a:xfrm>
-          <a:prstGeom prst="ellipse">
-            <a:avLst/>
-          </a:prstGeom>
-        </p:spPr>
-      </p:pic>
-      <p:pic>
-        <p:nvPicPr>
-          <p:cNvPr id="6" name="Image 1" descr="ministere_enseignement_superieur.jpg">    </p:cNvPr>
-          <p:cNvPicPr>
-            <a:picLocks noChangeAspect="1"/>
-          </p:cNvPicPr>
-          <p:nvPr/>
-        </p:nvPicPr>
-        <p:blipFill>
-          <a:blip r:embed="rId2"/>
-          <a:stretch>
-            <a:fillRect/>
-          </a:stretch>
-        </p:blipFill>
-        <p:spPr>
-          <a:xfrm>
-            <a:off x="1444752" y="502920"/>
-            <a:ext cx="777240" cy="777240"/>
-          </a:xfrm>
-          <a:prstGeom prst="ellipse">
-            <a:avLst/>
-          </a:prstGeom>
-        </p:spPr>
-      </p:pic>
-      <p:pic>
-        <p:nvPicPr>
-          <p:cNvPr id="7" name="Image 2" descr="togo_ai_lab.jpg">    </p:cNvPr>
+          <p:cNvPr id="5" name="Image 0" descr="ministere_education_nationale.jpg"/>
           <p:cNvPicPr>
             <a:picLocks noChangeAspect="1"/>
           </p:cNvPicPr>
@@ -2413,8 +1631,8 @@
         </p:blipFill>
         <p:spPr>
           <a:xfrm>
-            <a:off x="2386584" y="502920"/>
-            <a:ext cx="777240" cy="777240"/>
+            <a:off x="1037844" y="68580"/>
+            <a:ext cx="1531620" cy="1531620"/>
           </a:xfrm>
           <a:prstGeom prst="ellipse">
             <a:avLst/>
@@ -2442,11 +1660,11 @@
           <a:bodyPr wrap="square" rtlCol="0" anchor="ctr"/>
           <a:lstStyle/>
           <a:p>
-            <a:pPr indent="0" marL="0">
-              <a:buNone/>
-            </a:pPr>
-            <a:r>
-              <a:rPr lang="en-US" sz="1200" b="1" spc="150" kern="0" dirty="0">
+            <a:pPr marL="0" indent="0">
+              <a:buNone/>
+            </a:pPr>
+            <a:r>
+              <a:rPr lang="en-US" sz="1200" b="1" kern="0" spc="150" dirty="0">
                 <a:solidFill>
                   <a:srgbClr val="8FB4D6"/>
                 </a:solidFill>
@@ -2481,7 +1699,7 @@
           <a:bodyPr wrap="square" rtlCol="0" anchor="ctr"/>
           <a:lstStyle/>
           <a:p>
-            <a:pPr indent="0" marL="0">
+            <a:pPr marL="0" indent="0">
               <a:lnSpc>
                 <a:spcPts val="4000"/>
               </a:lnSpc>
@@ -2501,7 +1719,7 @@
             <a:endParaRPr lang="en-US" sz="3400" dirty="0"/>
           </a:p>
           <a:p>
-            <a:pPr indent="0" marL="0">
+            <a:pPr marL="0" indent="0">
               <a:lnSpc>
                 <a:spcPts val="4000"/>
               </a:lnSpc>
@@ -2521,7 +1739,7 @@
             <a:endParaRPr lang="en-US" sz="3400" dirty="0"/>
           </a:p>
           <a:p>
-            <a:pPr indent="0" marL="0">
+            <a:pPr marL="0" indent="0">
               <a:lnSpc>
                 <a:spcPts val="4000"/>
               </a:lnSpc>
@@ -2563,7 +1781,7 @@
           <a:bodyPr wrap="square" rtlCol="0" anchor="ctr"/>
           <a:lstStyle/>
           <a:p>
-            <a:pPr indent="0" marL="0">
+            <a:pPr marL="0" indent="0">
               <a:buNone/>
             </a:pPr>
             <a:r>
@@ -2622,7 +1840,7 @@
           <a:bodyPr wrap="square" rtlCol="0" anchor="ctr"/>
           <a:lstStyle/>
           <a:p>
-            <a:pPr indent="0" marL="0">
+            <a:pPr marL="0" indent="0">
               <a:buNone/>
             </a:pPr>
             <a:r>
@@ -2661,7 +1879,7 @@
           <a:bodyPr wrap="square" rtlCol="0" anchor="ctr"/>
           <a:lstStyle/>
           <a:p>
-            <a:pPr indent="0" marL="0">
+            <a:pPr marL="0" indent="0">
               <a:buNone/>
             </a:pPr>
             <a:r>
@@ -2700,7 +1918,7 @@
           <a:bodyPr wrap="square" rtlCol="0" anchor="ctr"/>
           <a:lstStyle/>
           <a:p>
-            <a:pPr indent="0" marL="0">
+            <a:pPr marL="0" indent="0">
               <a:buNone/>
             </a:pPr>
             <a:r>
@@ -2712,7 +1930,29 @@
                 <a:ea typeface="Calibri" pitchFamily="34" charset="-122"/>
                 <a:cs typeface="Calibri" pitchFamily="34" charset="-120"/>
               </a:rPr>
-              <a:t>Ingénieur de Travaux Informatiques — TOGO AI LAB</a:t>
+              <a:t>Ingénieur de Travaux </a:t>
+            </a:r>
+            <a:r>
+              <a:rPr lang="en-US" sz="1150" dirty="0" err="1">
+                <a:solidFill>
+                  <a:srgbClr val="BFD8EA"/>
+                </a:solidFill>
+                <a:latin typeface="Calibri" pitchFamily="34" charset="0"/>
+                <a:ea typeface="Calibri" pitchFamily="34" charset="-122"/>
+                <a:cs typeface="Calibri" pitchFamily="34" charset="-120"/>
+              </a:rPr>
+              <a:t>Informatiques</a:t>
+            </a:r>
+            <a:r>
+              <a:rPr lang="en-US" sz="1150" dirty="0">
+                <a:solidFill>
+                  <a:srgbClr val="BFD8EA"/>
+                </a:solidFill>
+                <a:latin typeface="Calibri" pitchFamily="34" charset="0"/>
+                <a:ea typeface="Calibri" pitchFamily="34" charset="-122"/>
+                <a:cs typeface="Calibri" pitchFamily="34" charset="-120"/>
+              </a:rPr>
+              <a:t> </a:t>
             </a:r>
             <a:endParaRPr lang="en-US" sz="1150" dirty="0"/>
           </a:p>
@@ -2739,7 +1979,7 @@
           <a:bodyPr wrap="square" rtlCol="0" anchor="ctr"/>
           <a:lstStyle/>
           <a:p>
-            <a:pPr indent="0" marL="0">
+            <a:pPr marL="0" indent="0">
               <a:buNone/>
             </a:pPr>
             <a:r>
@@ -2756,7 +1996,7 @@
             <a:endParaRPr lang="en-US" sz="1000" dirty="0"/>
           </a:p>
           <a:p>
-            <a:pPr indent="0" marL="0">
+            <a:pPr marL="0" indent="0">
               <a:buNone/>
             </a:pPr>
             <a:r>
@@ -2795,7 +2035,7 @@
           <a:bodyPr wrap="square" rtlCol="0" anchor="ctr"/>
           <a:lstStyle/>
           <a:p>
-            <a:pPr indent="0" marL="0">
+            <a:pPr marL="0" indent="0">
               <a:buNone/>
             </a:pPr>
             <a:r>
@@ -2834,7 +2074,7 @@
           <a:bodyPr wrap="square" rtlCol="0" anchor="ctr"/>
           <a:lstStyle/>
           <a:p>
-            <a:pPr indent="0" marL="0">
+            <a:pPr marL="0" indent="0">
               <a:lnSpc>
                 <a:spcPts val="2200"/>
               </a:lnSpc>
@@ -2854,7 +2094,7 @@
             <a:endParaRPr lang="en-US" sz="1450" dirty="0"/>
           </a:p>
           <a:p>
-            <a:pPr indent="0" marL="0">
+            <a:pPr marL="0" indent="0">
               <a:lnSpc>
                 <a:spcPts val="2200"/>
               </a:lnSpc>
@@ -2918,7 +2158,7 @@
           <a:bodyPr wrap="square" rtlCol="0" anchor="ctr"/>
           <a:lstStyle/>
           <a:p>
-            <a:pPr indent="0" marL="0">
+            <a:pPr marL="0" indent="0">
               <a:buNone/>
             </a:pPr>
             <a:r>
@@ -2957,7 +2197,7 @@
           <a:bodyPr wrap="square" rtlCol="0" anchor="ctr"/>
           <a:lstStyle/>
           <a:p>
-            <a:pPr indent="0" marL="0">
+            <a:pPr marL="0" indent="0">
               <a:buNone/>
             </a:pPr>
             <a:r>
@@ -2996,7 +2236,7 @@
           <a:bodyPr wrap="square" rtlCol="0" anchor="ctr"/>
           <a:lstStyle/>
           <a:p>
-            <a:pPr algn="r" indent="0" marL="0">
+            <a:pPr marL="0" indent="0" algn="r">
               <a:buNone/>
             </a:pPr>
             <a:r>
@@ -3013,7 +2253,7 @@
             <a:endParaRPr lang="en-US" sz="1050" dirty="0"/>
           </a:p>
           <a:p>
-            <a:pPr algn="r" indent="0" marL="0">
+            <a:pPr marL="0" indent="0" algn="r">
               <a:buNone/>
             </a:pPr>
             <a:r>
@@ -3047,6 +2287,7 @@
         <a:solidFill>
           <a:srgbClr val="082C4A"/>
         </a:solidFill>
+        <a:effectLst/>
       </p:bgPr>
     </p:bg>
     <p:spTree>
@@ -3124,11 +2365,11 @@
           <a:bodyPr wrap="square" rtlCol="0" anchor="ctr"/>
           <a:lstStyle/>
           <a:p>
-            <a:pPr indent="0" marL="0">
-              <a:buNone/>
-            </a:pPr>
-            <a:r>
-              <a:rPr lang="en-US" sz="1200" b="1" spc="200" kern="0" dirty="0">
+            <a:pPr marL="0" indent="0">
+              <a:buNone/>
+            </a:pPr>
+            <a:r>
+              <a:rPr lang="en-US" sz="1200" b="1" kern="0" spc="200" dirty="0">
                 <a:solidFill>
                   <a:srgbClr val="17A2B8"/>
                 </a:solidFill>
@@ -3163,7 +2404,7 @@
           <a:bodyPr wrap="square" rtlCol="0" anchor="ctr"/>
           <a:lstStyle/>
           <a:p>
-            <a:pPr indent="0" marL="0">
+            <a:pPr marL="0" indent="0">
               <a:buNone/>
             </a:pPr>
             <a:r>
@@ -3202,7 +2443,7 @@
           <a:bodyPr wrap="square" rtlCol="0" anchor="ctr"/>
           <a:lstStyle/>
           <a:p>
-            <a:pPr indent="0" marL="0">
+            <a:pPr marL="0" indent="0">
               <a:lnSpc>
                 <a:spcPts val="2100"/>
               </a:lnSpc>
@@ -3217,7 +2458,29 @@
                 <a:ea typeface="Calibri" pitchFamily="34" charset="-122"/>
                 <a:cs typeface="Calibri" pitchFamily="34" charset="-120"/>
               </a:rPr>
-              <a:t>Ce tableau de bord transforme des données ouvertes dispersées en un instrument de pilotage unique — cartographie, indice composite IAFE, théorie des graphes et recommandations chiffrées — au service d'une meilleure adéquation entre formation et emploi au Togo.</a:t>
+              <a:t>Ce tableau de bord transforme des données ouvertes dispersées en un instrument de pilotage unique - cartographie, indice composite IAFE, théorie des graphes et recommandations </a:t>
+            </a:r>
+            <a:r>
+              <a:rPr lang="en-US" sz="1450" dirty="0" err="1">
+                <a:solidFill>
+                  <a:srgbClr val="D8E6F2"/>
+                </a:solidFill>
+                <a:latin typeface="Calibri" pitchFamily="34" charset="0"/>
+                <a:ea typeface="Calibri" pitchFamily="34" charset="-122"/>
+                <a:cs typeface="Calibri" pitchFamily="34" charset="-120"/>
+              </a:rPr>
+              <a:t>chiffrées</a:t>
+            </a:r>
+            <a:r>
+              <a:rPr lang="en-US" sz="1450" dirty="0">
+                <a:solidFill>
+                  <a:srgbClr val="D8E6F2"/>
+                </a:solidFill>
+                <a:latin typeface="Calibri" pitchFamily="34" charset="0"/>
+                <a:ea typeface="Calibri" pitchFamily="34" charset="-122"/>
+                <a:cs typeface="Calibri" pitchFamily="34" charset="-120"/>
+              </a:rPr>
+              <a:t> - au service d'une meilleure adéquation entre formation et emploi au Togo.</a:t>
             </a:r>
             <a:endParaRPr lang="en-US" sz="1450" dirty="0"/>
           </a:p>
@@ -3266,7 +2529,7 @@
           <a:bodyPr wrap="square" rtlCol="0" anchor="ctr"/>
           <a:lstStyle/>
           <a:p>
-            <a:pPr indent="0" marL="0">
+            <a:pPr marL="0" indent="0">
               <a:lnSpc>
                 <a:spcPts val="2200"/>
               </a:lnSpc>
@@ -3283,12 +2546,6 @@
               </a:rPr>
               <a:t>IAFE national 52,0/100  ·  </a:t>
             </a:r>
-            <a:pPr indent="0" marL="0">
-              <a:lnSpc>
-                <a:spcPts val="2200"/>
-              </a:lnSpc>
-              <a:buNone/>
-            </a:pPr>
             <a:r>
               <a:rPr lang="en-US" sz="1500" dirty="0">
                 <a:solidFill>
@@ -3298,24 +2555,7 @@
                 <a:ea typeface="Calibri" pitchFamily="34" charset="-122"/>
                 <a:cs typeface="Calibri" pitchFamily="34" charset="-120"/>
               </a:rPr>
-              <a:t>2 régions en Priorité 1 (Plateaux, Centrale)  ·  </a:t>
-            </a:r>
-            <a:pPr indent="0" marL="0">
-              <a:lnSpc>
-                <a:spcPts val="2200"/>
-              </a:lnSpc>
-              <a:buNone/>
-            </a:pPr>
-            <a:r>
-              <a:rPr lang="en-US" sz="1500" dirty="0">
-                <a:solidFill>
-                  <a:srgbClr val="D8E6F2"/>
-                </a:solidFill>
-                <a:latin typeface="Calibri" pitchFamily="34" charset="0"/>
-                <a:ea typeface="Calibri" pitchFamily="34" charset="-122"/>
-                <a:cs typeface="Calibri" pitchFamily="34" charset="-120"/>
-              </a:rPr>
-              <a:t>256 établissements cartographiés</a:t>
+              <a:t>2 régions en Priorité 1 (Plateaux, Centrale)  ·  256 établissements cartographiés</a:t>
             </a:r>
             <a:endParaRPr lang="en-US" sz="1500" dirty="0"/>
           </a:p>
@@ -3342,11 +2582,11 @@
           <a:bodyPr wrap="square" rtlCol="0" anchor="ctr"/>
           <a:lstStyle/>
           <a:p>
-            <a:pPr indent="0" marL="0">
-              <a:buNone/>
-            </a:pPr>
-            <a:r>
-              <a:rPr lang="en-US" sz="1100" b="1" spc="150" kern="0" dirty="0">
+            <a:pPr marL="0" indent="0">
+              <a:buNone/>
+            </a:pPr>
+            <a:r>
+              <a:rPr lang="en-US" sz="1100" b="1" kern="0" spc="150" dirty="0">
                 <a:solidFill>
                   <a:srgbClr val="17A2B8"/>
                 </a:solidFill>
@@ -3381,7 +2621,7 @@
           <a:bodyPr wrap="square" rtlCol="0" anchor="ctr"/>
           <a:lstStyle/>
           <a:p>
-            <a:pPr indent="0" marL="0">
+            <a:pPr marL="0" indent="0">
               <a:lnSpc>
                 <a:spcPts val="1600"/>
               </a:lnSpc>
@@ -3404,55 +2644,7 @@
       </p:sp>
       <p:pic>
         <p:nvPicPr>
-          <p:cNvPr id="11" name="Image 0" descr="ministere_education_nationale.jpg">    </p:cNvPr>
-          <p:cNvPicPr>
-            <a:picLocks noChangeAspect="1"/>
-          </p:cNvPicPr>
-          <p:nvPr/>
-        </p:nvPicPr>
-        <p:blipFill>
-          <a:blip r:embed="rId1"/>
-          <a:stretch>
-            <a:fillRect/>
-          </a:stretch>
-        </p:blipFill>
-        <p:spPr>
-          <a:xfrm>
-            <a:off x="9966960" y="5257800"/>
-            <a:ext cx="685800" cy="685800"/>
-          </a:xfrm>
-          <a:prstGeom prst="ellipse">
-            <a:avLst/>
-          </a:prstGeom>
-        </p:spPr>
-      </p:pic>
-      <p:pic>
-        <p:nvPicPr>
-          <p:cNvPr id="12" name="Image 1" descr="ministere_enseignement_superieur.jpg">    </p:cNvPr>
-          <p:cNvPicPr>
-            <a:picLocks noChangeAspect="1"/>
-          </p:cNvPicPr>
-          <p:nvPr/>
-        </p:nvPicPr>
-        <p:blipFill>
-          <a:blip r:embed="rId2"/>
-          <a:stretch>
-            <a:fillRect/>
-          </a:stretch>
-        </p:blipFill>
-        <p:spPr>
-          <a:xfrm>
-            <a:off x="10744200" y="5257800"/>
-            <a:ext cx="685800" cy="685800"/>
-          </a:xfrm>
-          <a:prstGeom prst="ellipse">
-            <a:avLst/>
-          </a:prstGeom>
-        </p:spPr>
-      </p:pic>
-      <p:pic>
-        <p:nvPicPr>
-          <p:cNvPr id="13" name="Image 2" descr="togo_ai_lab.jpg">    </p:cNvPr>
+          <p:cNvPr id="11" name="Image 0" descr="ministere_education_nationale.jpg"/>
           <p:cNvPicPr>
             <a:picLocks noChangeAspect="1"/>
           </p:cNvPicPr>
@@ -3466,6 +2658,54 @@
         </p:blipFill>
         <p:spPr>
           <a:xfrm>
+            <a:off x="9966960" y="5257800"/>
+            <a:ext cx="685800" cy="685800"/>
+          </a:xfrm>
+          <a:prstGeom prst="ellipse">
+            <a:avLst/>
+          </a:prstGeom>
+        </p:spPr>
+      </p:pic>
+      <p:pic>
+        <p:nvPicPr>
+          <p:cNvPr id="12" name="Image 1" descr="ministere_enseignement_superieur.jpg"/>
+          <p:cNvPicPr>
+            <a:picLocks noChangeAspect="1"/>
+          </p:cNvPicPr>
+          <p:nvPr/>
+        </p:nvPicPr>
+        <p:blipFill>
+          <a:blip r:embed="rId4"/>
+          <a:stretch>
+            <a:fillRect/>
+          </a:stretch>
+        </p:blipFill>
+        <p:spPr>
+          <a:xfrm>
+            <a:off x="10744200" y="5257800"/>
+            <a:ext cx="685800" cy="685800"/>
+          </a:xfrm>
+          <a:prstGeom prst="ellipse">
+            <a:avLst/>
+          </a:prstGeom>
+        </p:spPr>
+      </p:pic>
+      <p:pic>
+        <p:nvPicPr>
+          <p:cNvPr id="13" name="Image 2" descr="togo_ai_lab.jpg"/>
+          <p:cNvPicPr>
+            <a:picLocks noChangeAspect="1"/>
+          </p:cNvPicPr>
+          <p:nvPr/>
+        </p:nvPicPr>
+        <p:blipFill>
+          <a:blip r:embed="rId5"/>
+          <a:stretch>
+            <a:fillRect/>
+          </a:stretch>
+        </p:blipFill>
+        <p:spPr>
+          <a:xfrm>
             <a:off x="11521440" y="5257800"/>
             <a:ext cx="685800" cy="685800"/>
           </a:xfrm>
@@ -3495,7 +2735,7 @@
           <a:bodyPr wrap="square" rtlCol="0" anchor="ctr"/>
           <a:lstStyle/>
           <a:p>
-            <a:pPr indent="0" marL="0">
+            <a:pPr marL="0" indent="0">
               <a:buNone/>
             </a:pPr>
             <a:r>
@@ -3507,7 +2747,29 @@
                 <a:ea typeface="Calibri" pitchFamily="34" charset="-122"/>
                 <a:cs typeface="Calibri" pitchFamily="34" charset="-120"/>
               </a:rPr>
-              <a:t>DAYO Kokou Cyrille · Ingénieur de Travaux Informatiques · TOGO AI LAB</a:t>
+              <a:t>DAYO Kokou Cyrille · Ingénieur de Travaux </a:t>
+            </a:r>
+            <a:r>
+              <a:rPr lang="en-US" sz="1000" dirty="0" err="1">
+                <a:solidFill>
+                  <a:srgbClr val="8FB4D6"/>
+                </a:solidFill>
+                <a:latin typeface="Calibri" pitchFamily="34" charset="0"/>
+                <a:ea typeface="Calibri" pitchFamily="34" charset="-122"/>
+                <a:cs typeface="Calibri" pitchFamily="34" charset="-120"/>
+              </a:rPr>
+              <a:t>Informatiques</a:t>
+            </a:r>
+            <a:r>
+              <a:rPr lang="en-US" sz="1000" dirty="0">
+                <a:solidFill>
+                  <a:srgbClr val="8FB4D6"/>
+                </a:solidFill>
+                <a:latin typeface="Calibri" pitchFamily="34" charset="0"/>
+                <a:ea typeface="Calibri" pitchFamily="34" charset="-122"/>
+                <a:cs typeface="Calibri" pitchFamily="34" charset="-120"/>
+              </a:rPr>
+              <a:t> ·</a:t>
             </a:r>
             <a:endParaRPr lang="en-US" sz="1000" dirty="0"/>
           </a:p>
@@ -3534,7 +2796,7 @@
           <a:bodyPr wrap="square" rtlCol="0" anchor="ctr"/>
           <a:lstStyle/>
           <a:p>
-            <a:pPr algn="r" indent="0" marL="0">
+            <a:pPr marL="0" indent="0" algn="r">
               <a:buNone/>
             </a:pPr>
             <a:r>
@@ -3598,11 +2860,11 @@
           <a:bodyPr wrap="square" rtlCol="0" anchor="ctr"/>
           <a:lstStyle/>
           <a:p>
-            <a:pPr indent="0" marL="0">
-              <a:buNone/>
-            </a:pPr>
-            <a:r>
-              <a:rPr lang="en-US" sz="1200" b="1" spc="150" kern="0" dirty="0">
+            <a:pPr marL="0" indent="0">
+              <a:buNone/>
+            </a:pPr>
+            <a:r>
+              <a:rPr lang="en-US" sz="1200" b="1" kern="0" spc="150" dirty="0">
                 <a:solidFill>
                   <a:srgbClr val="17A2B8"/>
                 </a:solidFill>
@@ -3637,7 +2899,7 @@
           <a:bodyPr wrap="square" rtlCol="0" anchor="ctr"/>
           <a:lstStyle/>
           <a:p>
-            <a:pPr indent="0" marL="0">
+            <a:pPr marL="0" indent="0">
               <a:buNone/>
             </a:pPr>
             <a:r>
@@ -3676,7 +2938,7 @@
           <a:bodyPr wrap="square" rtlCol="0" anchor="ctr"/>
           <a:lstStyle/>
           <a:p>
-            <a:pPr indent="0" marL="0">
+            <a:pPr marL="0" indent="0">
               <a:lnSpc>
                 <a:spcPts val="2200"/>
               </a:lnSpc>
@@ -3740,7 +3002,7 @@
           <a:bodyPr wrap="square" rtlCol="0" anchor="ctr"/>
           <a:lstStyle/>
           <a:p>
-            <a:pPr indent="0" marL="0">
+            <a:pPr marL="0" indent="0">
               <a:buNone/>
             </a:pPr>
             <a:r>
@@ -3776,7 +3038,7 @@
           <a:bodyPr wrap="square" rtlCol="0" anchor="ctr"/>
           <a:lstStyle/>
           <a:p>
-            <a:pPr indent="0" marL="0">
+            <a:pPr marL="0" indent="0">
               <a:buNone/>
             </a:pPr>
             <a:r>
@@ -3815,7 +3077,7 @@
           <a:bodyPr wrap="square" rtlCol="0" anchor="ctr"/>
           <a:lstStyle/>
           <a:p>
-            <a:pPr indent="0" marL="0">
+            <a:pPr marL="0" indent="0">
               <a:lnSpc>
                 <a:spcPts val="1300"/>
               </a:lnSpc>
@@ -3879,7 +3141,7 @@
           <a:bodyPr wrap="square" rtlCol="0" anchor="ctr"/>
           <a:lstStyle/>
           <a:p>
-            <a:pPr indent="0" marL="0">
+            <a:pPr marL="0" indent="0">
               <a:buNone/>
             </a:pPr>
             <a:r>
@@ -3915,7 +3177,7 @@
           <a:bodyPr wrap="square" rtlCol="0" anchor="ctr"/>
           <a:lstStyle/>
           <a:p>
-            <a:pPr indent="0" marL="0">
+            <a:pPr marL="0" indent="0">
               <a:buNone/>
             </a:pPr>
             <a:r>
@@ -3954,7 +3216,7 @@
           <a:bodyPr wrap="square" rtlCol="0" anchor="ctr"/>
           <a:lstStyle/>
           <a:p>
-            <a:pPr indent="0" marL="0">
+            <a:pPr marL="0" indent="0">
               <a:lnSpc>
                 <a:spcPts val="1300"/>
               </a:lnSpc>
@@ -4018,7 +3280,7 @@
           <a:bodyPr wrap="square" rtlCol="0" anchor="ctr"/>
           <a:lstStyle/>
           <a:p>
-            <a:pPr indent="0" marL="0">
+            <a:pPr marL="0" indent="0">
               <a:buNone/>
             </a:pPr>
             <a:r>
@@ -4054,7 +3316,7 @@
           <a:bodyPr wrap="square" rtlCol="0" anchor="ctr"/>
           <a:lstStyle/>
           <a:p>
-            <a:pPr indent="0" marL="0">
+            <a:pPr marL="0" indent="0">
               <a:buNone/>
             </a:pPr>
             <a:r>
@@ -4093,7 +3355,7 @@
           <a:bodyPr wrap="square" rtlCol="0" anchor="ctr"/>
           <a:lstStyle/>
           <a:p>
-            <a:pPr indent="0" marL="0">
+            <a:pPr marL="0" indent="0">
               <a:lnSpc>
                 <a:spcPts val="1300"/>
               </a:lnSpc>
@@ -4157,7 +3419,7 @@
           <a:bodyPr wrap="square" rtlCol="0" anchor="ctr"/>
           <a:lstStyle/>
           <a:p>
-            <a:pPr indent="0" marL="0">
+            <a:pPr marL="0" indent="0">
               <a:buNone/>
             </a:pPr>
             <a:r>
@@ -4193,7 +3455,7 @@
           <a:bodyPr wrap="square" rtlCol="0" anchor="ctr"/>
           <a:lstStyle/>
           <a:p>
-            <a:pPr indent="0" marL="0">
+            <a:pPr marL="0" indent="0">
               <a:buNone/>
             </a:pPr>
             <a:r>
@@ -4232,7 +3494,7 @@
           <a:bodyPr wrap="square" rtlCol="0" anchor="ctr"/>
           <a:lstStyle/>
           <a:p>
-            <a:pPr indent="0" marL="0">
+            <a:pPr marL="0" indent="0">
               <a:lnSpc>
                 <a:spcPts val="1300"/>
               </a:lnSpc>
@@ -4296,11 +3558,11 @@
           <a:bodyPr wrap="square" rtlCol="0" anchor="ctr"/>
           <a:lstStyle/>
           <a:p>
-            <a:pPr indent="0" marL="0">
-              <a:buNone/>
-            </a:pPr>
-            <a:r>
-              <a:rPr lang="en-US" sz="1100" b="1" spc="120" kern="0" dirty="0">
+            <a:pPr marL="0" indent="0">
+              <a:buNone/>
+            </a:pPr>
+            <a:r>
+              <a:rPr lang="en-US" sz="1100" b="1" kern="0" spc="120" dirty="0">
                 <a:solidFill>
                   <a:srgbClr val="17A2B8"/>
                 </a:solidFill>
@@ -4462,7 +3724,7 @@
           <a:bodyPr wrap="square" rtlCol="0" anchor="ctr"/>
           <a:lstStyle/>
           <a:p>
-            <a:pPr algn="r" indent="0" marL="0">
+            <a:pPr marL="0" indent="0" algn="r">
               <a:buNone/>
             </a:pPr>
             <a:r>
@@ -4501,7 +3763,7 @@
           <a:bodyPr wrap="square" rtlCol="0" anchor="ctr"/>
           <a:lstStyle/>
           <a:p>
-            <a:pPr indent="0" marL="0">
+            <a:pPr marL="0" indent="0">
               <a:buNone/>
             </a:pPr>
             <a:r>
@@ -4565,11 +3827,11 @@
           <a:bodyPr wrap="square" rtlCol="0" anchor="ctr"/>
           <a:lstStyle/>
           <a:p>
-            <a:pPr indent="0" marL="0">
-              <a:buNone/>
-            </a:pPr>
-            <a:r>
-              <a:rPr lang="en-US" sz="1200" b="1" spc="150" kern="0" dirty="0">
+            <a:pPr marL="0" indent="0">
+              <a:buNone/>
+            </a:pPr>
+            <a:r>
+              <a:rPr lang="en-US" sz="1200" b="1" kern="0" spc="150" dirty="0">
                 <a:solidFill>
                   <a:srgbClr val="17A2B8"/>
                 </a:solidFill>
@@ -4604,7 +3866,7 @@
           <a:bodyPr wrap="square" rtlCol="0" anchor="ctr"/>
           <a:lstStyle/>
           <a:p>
-            <a:pPr indent="0" marL="0">
+            <a:pPr marL="0" indent="0">
               <a:buNone/>
             </a:pPr>
             <a:r>
@@ -4643,7 +3905,7 @@
           <a:bodyPr wrap="square" rtlCol="0" anchor="ctr"/>
           <a:lstStyle/>
           <a:p>
-            <a:pPr indent="0" marL="0">
+            <a:pPr marL="0" indent="0">
               <a:lnSpc>
                 <a:spcPts val="1900"/>
               </a:lnSpc>
@@ -4690,7 +3952,7 @@
             <a:prstDash val="solid"/>
           </a:ln>
           <a:effectLst>
-            <a:outerShdw sx="100000" sy="100000" kx="0" ky="0" algn="bl" rotWithShape="0" blurRad="76200" dist="25400" dir="5400000">
+            <a:outerShdw blurRad="76200" dist="25400" dir="5400000" algn="bl" rotWithShape="0">
               <a:srgbClr val="0B1F33">
                 <a:alpha val="10000"/>
               </a:srgbClr>
@@ -4739,7 +4001,7 @@
           <a:bodyPr wrap="square" rtlCol="0" anchor="ctr"/>
           <a:lstStyle/>
           <a:p>
-            <a:pPr indent="0" marL="0">
+            <a:pPr marL="0" indent="0">
               <a:buNone/>
             </a:pPr>
             <a:r>
@@ -4775,7 +4037,7 @@
           <a:bodyPr wrap="square" rtlCol="0" anchor="ctr"/>
           <a:lstStyle/>
           <a:p>
-            <a:pPr algn="r" indent="0" marL="0">
+            <a:pPr marL="0" indent="0" algn="r">
               <a:buNone/>
             </a:pPr>
             <a:r>
@@ -4814,7 +4076,7 @@
           <a:bodyPr wrap="square" rtlCol="0" anchor="ctr"/>
           <a:lstStyle/>
           <a:p>
-            <a:pPr indent="0" marL="0">
+            <a:pPr marL="0" indent="0">
               <a:lnSpc>
                 <a:spcPts val="1500"/>
               </a:lnSpc>
@@ -4856,7 +4118,7 @@
           <a:bodyPr wrap="square" rtlCol="0" anchor="ctr"/>
           <a:lstStyle/>
           <a:p>
-            <a:pPr indent="0" marL="0">
+            <a:pPr marL="0" indent="0">
               <a:lnSpc>
                 <a:spcPts val="1300"/>
               </a:lnSpc>
@@ -4903,7 +4165,7 @@
             <a:prstDash val="solid"/>
           </a:ln>
           <a:effectLst>
-            <a:outerShdw sx="100000" sy="100000" kx="0" ky="0" algn="bl" rotWithShape="0" blurRad="76200" dist="25400" dir="5400000">
+            <a:outerShdw blurRad="76200" dist="25400" dir="5400000" algn="bl" rotWithShape="0">
               <a:srgbClr val="0B1F33">
                 <a:alpha val="10000"/>
               </a:srgbClr>
@@ -4952,7 +4214,7 @@
           <a:bodyPr wrap="square" rtlCol="0" anchor="ctr"/>
           <a:lstStyle/>
           <a:p>
-            <a:pPr indent="0" marL="0">
+            <a:pPr marL="0" indent="0">
               <a:buNone/>
             </a:pPr>
             <a:r>
@@ -4988,7 +4250,7 @@
           <a:bodyPr wrap="square" rtlCol="0" anchor="ctr"/>
           <a:lstStyle/>
           <a:p>
-            <a:pPr algn="r" indent="0" marL="0">
+            <a:pPr marL="0" indent="0" algn="r">
               <a:buNone/>
             </a:pPr>
             <a:r>
@@ -5027,7 +4289,7 @@
           <a:bodyPr wrap="square" rtlCol="0" anchor="ctr"/>
           <a:lstStyle/>
           <a:p>
-            <a:pPr indent="0" marL="0">
+            <a:pPr marL="0" indent="0">
               <a:lnSpc>
                 <a:spcPts val="1500"/>
               </a:lnSpc>
@@ -5069,7 +4331,7 @@
           <a:bodyPr wrap="square" rtlCol="0" anchor="ctr"/>
           <a:lstStyle/>
           <a:p>
-            <a:pPr indent="0" marL="0">
+            <a:pPr marL="0" indent="0">
               <a:lnSpc>
                 <a:spcPts val="1300"/>
               </a:lnSpc>
@@ -5116,7 +4378,7 @@
             <a:prstDash val="solid"/>
           </a:ln>
           <a:effectLst>
-            <a:outerShdw sx="100000" sy="100000" kx="0" ky="0" algn="bl" rotWithShape="0" blurRad="76200" dist="25400" dir="5400000">
+            <a:outerShdw blurRad="76200" dist="25400" dir="5400000" algn="bl" rotWithShape="0">
               <a:srgbClr val="0B1F33">
                 <a:alpha val="10000"/>
               </a:srgbClr>
@@ -5165,7 +4427,7 @@
           <a:bodyPr wrap="square" rtlCol="0" anchor="ctr"/>
           <a:lstStyle/>
           <a:p>
-            <a:pPr indent="0" marL="0">
+            <a:pPr marL="0" indent="0">
               <a:buNone/>
             </a:pPr>
             <a:r>
@@ -5201,7 +4463,7 @@
           <a:bodyPr wrap="square" rtlCol="0" anchor="ctr"/>
           <a:lstStyle/>
           <a:p>
-            <a:pPr algn="r" indent="0" marL="0">
+            <a:pPr marL="0" indent="0" algn="r">
               <a:buNone/>
             </a:pPr>
             <a:r>
@@ -5240,7 +4502,7 @@
           <a:bodyPr wrap="square" rtlCol="0" anchor="ctr"/>
           <a:lstStyle/>
           <a:p>
-            <a:pPr indent="0" marL="0">
+            <a:pPr marL="0" indent="0">
               <a:lnSpc>
                 <a:spcPts val="1500"/>
               </a:lnSpc>
@@ -5282,7 +4544,7 @@
           <a:bodyPr wrap="square" rtlCol="0" anchor="ctr"/>
           <a:lstStyle/>
           <a:p>
-            <a:pPr indent="0" marL="0">
+            <a:pPr marL="0" indent="0">
               <a:lnSpc>
                 <a:spcPts val="1300"/>
               </a:lnSpc>
@@ -5329,7 +4591,7 @@
             <a:prstDash val="solid"/>
           </a:ln>
           <a:effectLst>
-            <a:outerShdw sx="100000" sy="100000" kx="0" ky="0" algn="bl" rotWithShape="0" blurRad="76200" dist="25400" dir="5400000">
+            <a:outerShdw blurRad="76200" dist="25400" dir="5400000" algn="bl" rotWithShape="0">
               <a:srgbClr val="0B1F33">
                 <a:alpha val="10000"/>
               </a:srgbClr>
@@ -5378,7 +4640,7 @@
           <a:bodyPr wrap="square" rtlCol="0" anchor="ctr"/>
           <a:lstStyle/>
           <a:p>
-            <a:pPr indent="0" marL="0">
+            <a:pPr marL="0" indent="0">
               <a:buNone/>
             </a:pPr>
             <a:r>
@@ -5414,7 +4676,7 @@
           <a:bodyPr wrap="square" rtlCol="0" anchor="ctr"/>
           <a:lstStyle/>
           <a:p>
-            <a:pPr algn="r" indent="0" marL="0">
+            <a:pPr marL="0" indent="0" algn="r">
               <a:buNone/>
             </a:pPr>
             <a:r>
@@ -5453,7 +4715,7 @@
           <a:bodyPr wrap="square" rtlCol="0" anchor="ctr"/>
           <a:lstStyle/>
           <a:p>
-            <a:pPr indent="0" marL="0">
+            <a:pPr marL="0" indent="0">
               <a:lnSpc>
                 <a:spcPts val="1500"/>
               </a:lnSpc>
@@ -5495,7 +4757,7 @@
           <a:bodyPr wrap="square" rtlCol="0" anchor="ctr"/>
           <a:lstStyle/>
           <a:p>
-            <a:pPr indent="0" marL="0">
+            <a:pPr marL="0" indent="0">
               <a:lnSpc>
                 <a:spcPts val="1300"/>
               </a:lnSpc>
@@ -5542,7 +4804,7 @@
             <a:prstDash val="solid"/>
           </a:ln>
           <a:effectLst>
-            <a:outerShdw sx="100000" sy="100000" kx="0" ky="0" algn="bl" rotWithShape="0" blurRad="76200" dist="25400" dir="5400000">
+            <a:outerShdw blurRad="76200" dist="25400" dir="5400000" algn="bl" rotWithShape="0">
               <a:srgbClr val="0B1F33">
                 <a:alpha val="10000"/>
               </a:srgbClr>
@@ -5591,7 +4853,7 @@
           <a:bodyPr wrap="square" rtlCol="0" anchor="ctr"/>
           <a:lstStyle/>
           <a:p>
-            <a:pPr indent="0" marL="0">
+            <a:pPr marL="0" indent="0">
               <a:buNone/>
             </a:pPr>
             <a:r>
@@ -5627,7 +4889,7 @@
           <a:bodyPr wrap="square" rtlCol="0" anchor="ctr"/>
           <a:lstStyle/>
           <a:p>
-            <a:pPr algn="r" indent="0" marL="0">
+            <a:pPr marL="0" indent="0" algn="r">
               <a:buNone/>
             </a:pPr>
             <a:r>
@@ -5666,7 +4928,7 @@
           <a:bodyPr wrap="square" rtlCol="0" anchor="ctr"/>
           <a:lstStyle/>
           <a:p>
-            <a:pPr indent="0" marL="0">
+            <a:pPr marL="0" indent="0">
               <a:lnSpc>
                 <a:spcPts val="1500"/>
               </a:lnSpc>
@@ -5708,7 +4970,7 @@
           <a:bodyPr wrap="square" rtlCol="0" anchor="ctr"/>
           <a:lstStyle/>
           <a:p>
-            <a:pPr indent="0" marL="0">
+            <a:pPr marL="0" indent="0">
               <a:lnSpc>
                 <a:spcPts val="1300"/>
               </a:lnSpc>
@@ -5750,7 +5012,7 @@
           <a:bodyPr wrap="square" rtlCol="0" anchor="ctr"/>
           <a:lstStyle/>
           <a:p>
-            <a:pPr algn="r" indent="0" marL="0">
+            <a:pPr marL="0" indent="0" algn="r">
               <a:buNone/>
             </a:pPr>
             <a:r>
@@ -5789,7 +5051,7 @@
           <a:bodyPr wrap="square" rtlCol="0" anchor="ctr"/>
           <a:lstStyle/>
           <a:p>
-            <a:pPr indent="0" marL="0">
+            <a:pPr marL="0" indent="0">
               <a:buNone/>
             </a:pPr>
             <a:r>
@@ -5853,11 +5115,11 @@
           <a:bodyPr wrap="square" rtlCol="0" anchor="ctr"/>
           <a:lstStyle/>
           <a:p>
-            <a:pPr indent="0" marL="0">
-              <a:buNone/>
-            </a:pPr>
-            <a:r>
-              <a:rPr lang="en-US" sz="1200" b="1" spc="150" kern="0" dirty="0">
+            <a:pPr marL="0" indent="0">
+              <a:buNone/>
+            </a:pPr>
+            <a:r>
+              <a:rPr lang="en-US" sz="1200" b="1" kern="0" spc="150" dirty="0">
                 <a:solidFill>
                   <a:srgbClr val="17A2B8"/>
                 </a:solidFill>
@@ -5892,7 +5154,7 @@
           <a:bodyPr wrap="square" rtlCol="0" anchor="ctr"/>
           <a:lstStyle/>
           <a:p>
-            <a:pPr indent="0" marL="0">
+            <a:pPr marL="0" indent="0">
               <a:buNone/>
             </a:pPr>
             <a:r>
@@ -5931,11 +5193,11 @@
           <a:bodyPr wrap="square" rtlCol="0" anchor="ctr"/>
           <a:lstStyle/>
           <a:p>
-            <a:pPr indent="0" marL="0">
-              <a:buNone/>
-            </a:pPr>
-            <a:r>
-              <a:rPr lang="en-US" sz="1200" b="1" spc="100" kern="0" dirty="0">
+            <a:pPr marL="0" indent="0">
+              <a:buNone/>
+            </a:pPr>
+            <a:r>
+              <a:rPr lang="en-US" sz="1200" b="1" kern="0" spc="100" dirty="0">
                 <a:solidFill>
                   <a:srgbClr val="17A2B8"/>
                 </a:solidFill>
@@ -6097,11 +5359,11 @@
           <a:bodyPr wrap="square" rtlCol="0" anchor="ctr"/>
           <a:lstStyle/>
           <a:p>
-            <a:pPr indent="0" marL="0">
-              <a:buNone/>
-            </a:pPr>
-            <a:r>
-              <a:rPr lang="en-US" sz="1200" b="1" spc="100" kern="0" dirty="0">
+            <a:pPr marL="0" indent="0">
+              <a:buNone/>
+            </a:pPr>
+            <a:r>
+              <a:rPr lang="en-US" sz="1200" b="1" kern="0" spc="100" dirty="0">
                 <a:solidFill>
                   <a:srgbClr val="17A2B8"/>
                 </a:solidFill>
@@ -6221,11 +5483,11 @@
           <a:bodyPr wrap="square" rtlCol="0" anchor="ctr"/>
           <a:lstStyle/>
           <a:p>
-            <a:pPr indent="0" marL="0">
-              <a:buNone/>
-            </a:pPr>
-            <a:r>
-              <a:rPr lang="en-US" sz="1200" b="1" spc="100" kern="0" dirty="0">
+            <a:pPr marL="0" indent="0">
+              <a:buNone/>
+            </a:pPr>
+            <a:r>
+              <a:rPr lang="en-US" sz="1200" b="1" kern="0" spc="100" dirty="0">
                 <a:solidFill>
                   <a:srgbClr val="17A2B8"/>
                 </a:solidFill>
@@ -6408,7 +5670,7 @@
           <a:bodyPr wrap="square" rtlCol="0" anchor="ctr"/>
           <a:lstStyle/>
           <a:p>
-            <a:pPr algn="r" indent="0" marL="0">
+            <a:pPr marL="0" indent="0" algn="r">
               <a:buNone/>
             </a:pPr>
             <a:r>
@@ -6447,7 +5709,7 @@
           <a:bodyPr wrap="square" rtlCol="0" anchor="ctr"/>
           <a:lstStyle/>
           <a:p>
-            <a:pPr indent="0" marL="0">
+            <a:pPr marL="0" indent="0">
               <a:buNone/>
             </a:pPr>
             <a:r>
@@ -6511,11 +5773,11 @@
           <a:bodyPr wrap="square" rtlCol="0" anchor="ctr"/>
           <a:lstStyle/>
           <a:p>
-            <a:pPr indent="0" marL="0">
-              <a:buNone/>
-            </a:pPr>
-            <a:r>
-              <a:rPr lang="en-US" sz="1200" b="1" spc="150" kern="0" dirty="0">
+            <a:pPr marL="0" indent="0">
+              <a:buNone/>
+            </a:pPr>
+            <a:r>
+              <a:rPr lang="en-US" sz="1200" b="1" kern="0" spc="150" dirty="0">
                 <a:solidFill>
                   <a:srgbClr val="17A2B8"/>
                 </a:solidFill>
@@ -6550,7 +5812,7 @@
           <a:bodyPr wrap="square" rtlCol="0" anchor="ctr"/>
           <a:lstStyle/>
           <a:p>
-            <a:pPr indent="0" marL="0">
+            <a:pPr marL="0" indent="0">
               <a:buNone/>
             </a:pPr>
             <a:r>
@@ -6594,7 +5856,7 @@
             <a:prstDash val="solid"/>
           </a:ln>
           <a:effectLst>
-            <a:outerShdw sx="100000" sy="100000" kx="0" ky="0" algn="bl" rotWithShape="0" blurRad="101600" dist="25400" dir="5400000">
+            <a:outerShdw blurRad="101600" dist="25400" dir="5400000" algn="bl" rotWithShape="0">
               <a:srgbClr val="0B1F33">
                 <a:alpha val="12000"/>
               </a:srgbClr>
@@ -6623,7 +5885,7 @@
           <a:bodyPr wrap="square" rtlCol="0" anchor="ctr"/>
           <a:lstStyle/>
           <a:p>
-            <a:pPr algn="ctr" indent="0" marL="0">
+            <a:pPr marL="0" indent="0" algn="ctr">
               <a:buNone/>
             </a:pPr>
             <a:r>
@@ -6662,7 +5924,7 @@
           <a:bodyPr wrap="square" rtlCol="0" anchor="t"/>
           <a:lstStyle/>
           <a:p>
-            <a:pPr algn="ctr" indent="0" marL="0">
+            <a:pPr marL="0" indent="0" algn="ctr">
               <a:buNone/>
             </a:pPr>
             <a:r>
@@ -6706,7 +5968,7 @@
             <a:prstDash val="solid"/>
           </a:ln>
           <a:effectLst>
-            <a:outerShdw sx="100000" sy="100000" kx="0" ky="0" algn="bl" rotWithShape="0" blurRad="101600" dist="25400" dir="5400000">
+            <a:outerShdw blurRad="101600" dist="25400" dir="5400000" algn="bl" rotWithShape="0">
               <a:srgbClr val="0B1F33">
                 <a:alpha val="12000"/>
               </a:srgbClr>
@@ -6735,7 +5997,7 @@
           <a:bodyPr wrap="square" rtlCol="0" anchor="ctr"/>
           <a:lstStyle/>
           <a:p>
-            <a:pPr algn="ctr" indent="0" marL="0">
+            <a:pPr marL="0" indent="0" algn="ctr">
               <a:buNone/>
             </a:pPr>
             <a:r>
@@ -6774,7 +6036,7 @@
           <a:bodyPr wrap="square" rtlCol="0" anchor="t"/>
           <a:lstStyle/>
           <a:p>
-            <a:pPr algn="ctr" indent="0" marL="0">
+            <a:pPr marL="0" indent="0" algn="ctr">
               <a:buNone/>
             </a:pPr>
             <a:r>
@@ -6818,7 +6080,7 @@
             <a:prstDash val="solid"/>
           </a:ln>
           <a:effectLst>
-            <a:outerShdw sx="100000" sy="100000" kx="0" ky="0" algn="bl" rotWithShape="0" blurRad="101600" dist="25400" dir="5400000">
+            <a:outerShdw blurRad="101600" dist="25400" dir="5400000" algn="bl" rotWithShape="0">
               <a:srgbClr val="0B1F33">
                 <a:alpha val="12000"/>
               </a:srgbClr>
@@ -6847,7 +6109,7 @@
           <a:bodyPr wrap="square" rtlCol="0" anchor="ctr"/>
           <a:lstStyle/>
           <a:p>
-            <a:pPr algn="ctr" indent="0" marL="0">
+            <a:pPr marL="0" indent="0" algn="ctr">
               <a:buNone/>
             </a:pPr>
             <a:r>
@@ -6886,7 +6148,7 @@
           <a:bodyPr wrap="square" rtlCol="0" anchor="t"/>
           <a:lstStyle/>
           <a:p>
-            <a:pPr algn="ctr" indent="0" marL="0">
+            <a:pPr marL="0" indent="0" algn="ctr">
               <a:buNone/>
             </a:pPr>
             <a:r>
@@ -6930,7 +6192,7 @@
             <a:prstDash val="solid"/>
           </a:ln>
           <a:effectLst>
-            <a:outerShdw sx="100000" sy="100000" kx="0" ky="0" algn="bl" rotWithShape="0" blurRad="101600" dist="25400" dir="5400000">
+            <a:outerShdw blurRad="101600" dist="25400" dir="5400000" algn="bl" rotWithShape="0">
               <a:srgbClr val="0B1F33">
                 <a:alpha val="12000"/>
               </a:srgbClr>
@@ -6959,7 +6221,7 @@
           <a:bodyPr wrap="square" rtlCol="0" anchor="ctr"/>
           <a:lstStyle/>
           <a:p>
-            <a:pPr algn="ctr" indent="0" marL="0">
+            <a:pPr marL="0" indent="0" algn="ctr">
               <a:buNone/>
             </a:pPr>
             <a:r>
@@ -6998,7 +6260,7 @@
           <a:bodyPr wrap="square" rtlCol="0" anchor="t"/>
           <a:lstStyle/>
           <a:p>
-            <a:pPr algn="ctr" indent="0" marL="0">
+            <a:pPr marL="0" indent="0" algn="ctr">
               <a:buNone/>
             </a:pPr>
             <a:r>
@@ -7042,7 +6304,7 @@
             <a:prstDash val="solid"/>
           </a:ln>
           <a:effectLst>
-            <a:outerShdw sx="100000" sy="100000" kx="0" ky="0" algn="bl" rotWithShape="0" blurRad="101600" dist="25400" dir="5400000">
+            <a:outerShdw blurRad="101600" dist="25400" dir="5400000" algn="bl" rotWithShape="0">
               <a:srgbClr val="0B1F33">
                 <a:alpha val="12000"/>
               </a:srgbClr>
@@ -7071,7 +6333,7 @@
           <a:bodyPr wrap="square" rtlCol="0" anchor="ctr"/>
           <a:lstStyle/>
           <a:p>
-            <a:pPr algn="ctr" indent="0" marL="0">
+            <a:pPr marL="0" indent="0" algn="ctr">
               <a:buNone/>
             </a:pPr>
             <a:r>
@@ -7110,7 +6372,7 @@
           <a:bodyPr wrap="square" rtlCol="0" anchor="t"/>
           <a:lstStyle/>
           <a:p>
-            <a:pPr algn="ctr" indent="0" marL="0">
+            <a:pPr marL="0" indent="0" algn="ctr">
               <a:buNone/>
             </a:pPr>
             <a:r>
@@ -7154,7 +6416,7 @@
             <a:prstDash val="solid"/>
           </a:ln>
           <a:effectLst>
-            <a:outerShdw sx="100000" sy="100000" kx="0" ky="0" algn="bl" rotWithShape="0" blurRad="101600" dist="25400" dir="5400000">
+            <a:outerShdw blurRad="101600" dist="25400" dir="5400000" algn="bl" rotWithShape="0">
               <a:srgbClr val="0B1F33">
                 <a:alpha val="12000"/>
               </a:srgbClr>
@@ -7183,7 +6445,7 @@
           <a:bodyPr wrap="square" rtlCol="0" anchor="ctr"/>
           <a:lstStyle/>
           <a:p>
-            <a:pPr algn="ctr" indent="0" marL="0">
+            <a:pPr marL="0" indent="0" algn="ctr">
               <a:buNone/>
             </a:pPr>
             <a:r>
@@ -7222,7 +6484,7 @@
           <a:bodyPr wrap="square" rtlCol="0" anchor="t"/>
           <a:lstStyle/>
           <a:p>
-            <a:pPr algn="ctr" indent="0" marL="0">
+            <a:pPr marL="0" indent="0" algn="ctr">
               <a:buNone/>
             </a:pPr>
             <a:r>
@@ -7266,7 +6528,7 @@
             <a:prstDash val="solid"/>
           </a:ln>
           <a:effectLst>
-            <a:outerShdw sx="100000" sy="100000" kx="0" ky="0" algn="bl" rotWithShape="0" blurRad="101600" dist="25400" dir="5400000">
+            <a:outerShdw blurRad="101600" dist="25400" dir="5400000" algn="bl" rotWithShape="0">
               <a:srgbClr val="0B1F33">
                 <a:alpha val="12000"/>
               </a:srgbClr>
@@ -7295,7 +6557,7 @@
           <a:bodyPr wrap="square" rtlCol="0" anchor="ctr"/>
           <a:lstStyle/>
           <a:p>
-            <a:pPr algn="ctr" indent="0" marL="0">
+            <a:pPr marL="0" indent="0" algn="ctr">
               <a:buNone/>
             </a:pPr>
             <a:r>
@@ -7334,7 +6596,7 @@
           <a:bodyPr wrap="square" rtlCol="0" anchor="t"/>
           <a:lstStyle/>
           <a:p>
-            <a:pPr algn="ctr" indent="0" marL="0">
+            <a:pPr marL="0" indent="0" algn="ctr">
               <a:buNone/>
             </a:pPr>
             <a:r>
@@ -7378,7 +6640,7 @@
             <a:prstDash val="solid"/>
           </a:ln>
           <a:effectLst>
-            <a:outerShdw sx="100000" sy="100000" kx="0" ky="0" algn="bl" rotWithShape="0" blurRad="101600" dist="25400" dir="5400000">
+            <a:outerShdw blurRad="101600" dist="25400" dir="5400000" algn="bl" rotWithShape="0">
               <a:srgbClr val="0B1F33">
                 <a:alpha val="12000"/>
               </a:srgbClr>
@@ -7407,7 +6669,7 @@
           <a:bodyPr wrap="square" rtlCol="0" anchor="ctr"/>
           <a:lstStyle/>
           <a:p>
-            <a:pPr algn="ctr" indent="0" marL="0">
+            <a:pPr marL="0" indent="0" algn="ctr">
               <a:buNone/>
             </a:pPr>
             <a:r>
@@ -7446,7 +6708,7 @@
           <a:bodyPr wrap="square" rtlCol="0" anchor="t"/>
           <a:lstStyle/>
           <a:p>
-            <a:pPr algn="ctr" indent="0" marL="0">
+            <a:pPr marL="0" indent="0" algn="ctr">
               <a:buNone/>
             </a:pPr>
             <a:r>
@@ -7485,7 +6747,7 @@
           <a:bodyPr wrap="square" rtlCol="0" anchor="ctr"/>
           <a:lstStyle/>
           <a:p>
-            <a:pPr indent="0" marL="0">
+            <a:pPr marL="0" indent="0">
               <a:buNone/>
             </a:pPr>
             <a:r>
@@ -7524,7 +6786,7 @@
           <a:bodyPr wrap="square" rtlCol="0" anchor="ctr"/>
           <a:lstStyle/>
           <a:p>
-            <a:pPr algn="r" indent="0" marL="0">
+            <a:pPr marL="0" indent="0" algn="r">
               <a:buNone/>
             </a:pPr>
             <a:r>
@@ -7563,7 +6825,7 @@
           <a:bodyPr wrap="square" rtlCol="0" anchor="ctr"/>
           <a:lstStyle/>
           <a:p>
-            <a:pPr indent="0" marL="0">
+            <a:pPr marL="0" indent="0">
               <a:buNone/>
             </a:pPr>
             <a:r>
@@ -7627,11 +6889,11 @@
           <a:bodyPr wrap="square" rtlCol="0" anchor="ctr"/>
           <a:lstStyle/>
           <a:p>
-            <a:pPr indent="0" marL="0">
-              <a:buNone/>
-            </a:pPr>
-            <a:r>
-              <a:rPr lang="en-US" sz="1200" b="1" spc="150" kern="0" dirty="0">
+            <a:pPr marL="0" indent="0">
+              <a:buNone/>
+            </a:pPr>
+            <a:r>
+              <a:rPr lang="en-US" sz="1200" b="1" kern="0" spc="150" dirty="0">
                 <a:solidFill>
                   <a:srgbClr val="17A2B8"/>
                 </a:solidFill>
@@ -7666,7 +6928,7 @@
           <a:bodyPr wrap="square" rtlCol="0" anchor="ctr"/>
           <a:lstStyle/>
           <a:p>
-            <a:pPr indent="0" marL="0">
+            <a:pPr marL="0" indent="0">
               <a:buNone/>
             </a:pPr>
             <a:r>
@@ -7705,7 +6967,7 @@
           <a:bodyPr wrap="square" rtlCol="0" anchor="ctr"/>
           <a:lstStyle/>
           <a:p>
-            <a:pPr indent="0" marL="0">
+            <a:pPr marL="0" indent="0">
               <a:buNone/>
             </a:pPr>
             <a:r>
@@ -7723,22 +6985,6 @@
           </a:p>
         </p:txBody>
       </p:sp>
-      <p:graphicFrame>
-        <p:nvGraphicFramePr>
-          <p:cNvPr id="5" name="Chart 0" descr=""/>
-          <p:cNvGraphicFramePr/>
-          <p:nvPr/>
-        </p:nvGraphicFramePr>
-        <p:xfrm>
-          <a:off x="502920" y="2331720"/>
-          <a:ext cx="5394960" cy="2788920"/>
-        </p:xfrm>
-        <a:graphic xmlns:a="http://schemas.openxmlformats.org/drawingml/2006/main">
-          <a:graphicData uri="http://schemas.openxmlformats.org/drawingml/2006/chart">
-            <c:chart xmlns:c="http://schemas.openxmlformats.org/drawingml/2006/chart" r:id="rId1"/>
-          </a:graphicData>
-        </a:graphic>
-      </p:graphicFrame>
       <p:sp>
         <p:nvSpPr>
           <p:cNvPr id="6" name="Text 3"/>
@@ -7760,7 +7006,7 @@
           <a:bodyPr wrap="square" rtlCol="0" anchor="ctr"/>
           <a:lstStyle/>
           <a:p>
-            <a:pPr indent="0" marL="0">
+            <a:pPr marL="0" indent="0">
               <a:buNone/>
             </a:pPr>
             <a:r>
@@ -7778,22 +7024,6 @@
           </a:p>
         </p:txBody>
       </p:sp>
-      <p:graphicFrame>
-        <p:nvGraphicFramePr>
-          <p:cNvPr id="7" name="Chart 1" descr=""/>
-          <p:cNvGraphicFramePr/>
-          <p:nvPr/>
-        </p:nvGraphicFramePr>
-        <p:xfrm>
-          <a:off x="6263640" y="2331720"/>
-          <a:ext cx="5394960" cy="2788920"/>
-        </p:xfrm>
-        <a:graphic xmlns:a="http://schemas.openxmlformats.org/drawingml/2006/main">
-          <a:graphicData uri="http://schemas.openxmlformats.org/drawingml/2006/chart">
-            <c:chart xmlns:c="http://schemas.openxmlformats.org/drawingml/2006/chart" r:id="rId2"/>
-          </a:graphicData>
-        </a:graphic>
-      </p:graphicFrame>
       <p:sp>
         <p:nvSpPr>
           <p:cNvPr id="8" name="Shape 4"/>
@@ -7837,7 +7067,7 @@
           <a:bodyPr wrap="square" rtlCol="0" anchor="ctr"/>
           <a:lstStyle/>
           <a:p>
-            <a:pPr indent="0" marL="0">
+            <a:pPr marL="0" indent="0">
               <a:lnSpc>
                 <a:spcPts val="1500"/>
               </a:lnSpc>
@@ -7854,12 +7084,6 @@
               </a:rPr>
               <a:t>Lecture : </a:t>
             </a:r>
-            <a:pPr indent="0" marL="0">
-              <a:lnSpc>
-                <a:spcPts val="1500"/>
-              </a:lnSpc>
-              <a:buNone/>
-            </a:pPr>
             <a:r>
               <a:rPr lang="en-US" sz="1150" dirty="0">
                 <a:solidFill>
@@ -7896,7 +7120,7 @@
           <a:bodyPr wrap="square" rtlCol="0" anchor="ctr"/>
           <a:lstStyle/>
           <a:p>
-            <a:pPr algn="r" indent="0" marL="0">
+            <a:pPr marL="0" indent="0" algn="r">
               <a:buNone/>
             </a:pPr>
             <a:r>
@@ -7935,7 +7159,7 @@
           <a:bodyPr wrap="square" rtlCol="0" anchor="ctr"/>
           <a:lstStyle/>
           <a:p>
-            <a:pPr indent="0" marL="0">
+            <a:pPr marL="0" indent="0">
               <a:buNone/>
             </a:pPr>
             <a:r>
@@ -7953,6 +7177,54 @@
           </a:p>
         </p:txBody>
       </p:sp>
+      <p:pic>
+        <p:nvPicPr>
+          <p:cNvPr id="12" name="Picture 11" descr="chart1_etablissements.png"/>
+          <p:cNvPicPr>
+            <a:picLocks noChangeAspect="1"/>
+          </p:cNvPicPr>
+          <p:nvPr/>
+        </p:nvPicPr>
+        <p:blipFill>
+          <a:blip r:embed="rId3"/>
+          <a:stretch>
+            <a:fillRect/>
+          </a:stretch>
+        </p:blipFill>
+        <p:spPr>
+          <a:xfrm>
+            <a:off x="502920" y="2331720"/>
+            <a:ext cx="5394960" cy="2788920"/>
+          </a:xfrm>
+          <a:prstGeom prst="rect">
+            <a:avLst/>
+          </a:prstGeom>
+        </p:spPr>
+      </p:pic>
+      <p:pic>
+        <p:nvPicPr>
+          <p:cNvPr id="13" name="Picture 12" descr="chart2_feas.png"/>
+          <p:cNvPicPr>
+            <a:picLocks noChangeAspect="1"/>
+          </p:cNvPicPr>
+          <p:nvPr/>
+        </p:nvPicPr>
+        <p:blipFill>
+          <a:blip r:embed="rId4"/>
+          <a:stretch>
+            <a:fillRect/>
+          </a:stretch>
+        </p:blipFill>
+        <p:spPr>
+          <a:xfrm>
+            <a:off x="6263640" y="2331720"/>
+            <a:ext cx="5394960" cy="2788920"/>
+          </a:xfrm>
+          <a:prstGeom prst="rect">
+            <a:avLst/>
+          </a:prstGeom>
+        </p:spPr>
+      </p:pic>
     </p:spTree>
   </p:cSld>
   <p:clrMapOvr>
@@ -7999,11 +7271,11 @@
           <a:bodyPr wrap="square" rtlCol="0" anchor="ctr"/>
           <a:lstStyle/>
           <a:p>
-            <a:pPr indent="0" marL="0">
-              <a:buNone/>
-            </a:pPr>
-            <a:r>
-              <a:rPr lang="en-US" sz="1200" b="1" spc="150" kern="0" dirty="0">
+            <a:pPr marL="0" indent="0">
+              <a:buNone/>
+            </a:pPr>
+            <a:r>
+              <a:rPr lang="en-US" sz="1200" b="1" kern="0" spc="150" dirty="0">
                 <a:solidFill>
                   <a:srgbClr val="17A2B8"/>
                 </a:solidFill>
@@ -8038,7 +7310,7 @@
           <a:bodyPr wrap="square" rtlCol="0" anchor="ctr"/>
           <a:lstStyle/>
           <a:p>
-            <a:pPr indent="0" marL="0">
+            <a:pPr marL="0" indent="0">
               <a:buNone/>
             </a:pPr>
             <a:r>
@@ -8099,11 +7371,11 @@
           <a:bodyPr wrap="square" rtlCol="0" anchor="ctr"/>
           <a:lstStyle/>
           <a:p>
-            <a:pPr indent="0" marL="0">
-              <a:buNone/>
-            </a:pPr>
-            <a:r>
-              <a:rPr lang="en-US" sz="1100" b="1" spc="100" kern="0" dirty="0">
+            <a:pPr marL="0" indent="0">
+              <a:buNone/>
+            </a:pPr>
+            <a:r>
+              <a:rPr lang="en-US" sz="1100" b="1" kern="0" spc="100" dirty="0">
                 <a:solidFill>
                   <a:srgbClr val="17A2B8"/>
                 </a:solidFill>
@@ -8138,7 +7410,7 @@
           <a:bodyPr wrap="square" rtlCol="0" anchor="ctr"/>
           <a:lstStyle/>
           <a:p>
-            <a:pPr indent="0" marL="0">
+            <a:pPr marL="0" indent="0">
               <a:buNone/>
             </a:pPr>
             <a:r>
@@ -8177,7 +7449,7 @@
           <a:bodyPr wrap="square" rtlCol="0" anchor="ctr"/>
           <a:lstStyle/>
           <a:p>
-            <a:pPr indent="0" marL="0">
+            <a:pPr marL="0" indent="0">
               <a:buNone/>
             </a:pPr>
             <a:r>
@@ -8216,7 +7488,7 @@
           <a:bodyPr wrap="square" rtlCol="0" anchor="ctr"/>
           <a:lstStyle/>
           <a:p>
-            <a:pPr indent="0" marL="0">
+            <a:pPr marL="0" indent="0">
               <a:lnSpc>
                 <a:spcPts val="1400"/>
               </a:lnSpc>
@@ -8278,7 +7550,7 @@
           <a:bodyPr wrap="square" rtlCol="0" anchor="ctr"/>
           <a:lstStyle/>
           <a:p>
-            <a:pPr indent="0" marL="0">
+            <a:pPr marL="0" indent="0">
               <a:lnSpc>
                 <a:spcPts val="1400"/>
               </a:lnSpc>
@@ -8320,7 +7592,7 @@
           <a:bodyPr wrap="square" rtlCol="0" anchor="ctr"/>
           <a:lstStyle/>
           <a:p>
-            <a:pPr indent="0" marL="0">
+            <a:pPr marL="0" indent="0">
               <a:buNone/>
             </a:pPr>
             <a:r>
@@ -8381,7 +7653,7 @@
           <a:bodyPr wrap="square" rtlCol="0" anchor="ctr"/>
           <a:lstStyle/>
           <a:p>
-            <a:pPr indent="0" marL="0">
+            <a:pPr marL="0" indent="0">
               <a:buNone/>
             </a:pPr>
             <a:r>
@@ -8420,7 +7692,7 @@
           <a:bodyPr wrap="square" rtlCol="0" anchor="ctr"/>
           <a:lstStyle/>
           <a:p>
-            <a:pPr indent="0" marL="0">
+            <a:pPr marL="0" indent="0">
               <a:buNone/>
             </a:pPr>
             <a:r>
@@ -8481,7 +7753,7 @@
           <a:bodyPr wrap="square" rtlCol="0" anchor="ctr"/>
           <a:lstStyle/>
           <a:p>
-            <a:pPr indent="0" marL="0">
+            <a:pPr marL="0" indent="0">
               <a:buNone/>
             </a:pPr>
             <a:r>
@@ -8520,7 +7792,7 @@
           <a:bodyPr wrap="square" rtlCol="0" anchor="ctr"/>
           <a:lstStyle/>
           <a:p>
-            <a:pPr indent="0" marL="0">
+            <a:pPr marL="0" indent="0">
               <a:buNone/>
             </a:pPr>
             <a:r>
@@ -8559,7 +7831,7 @@
           <a:bodyPr wrap="square" rtlCol="0" anchor="ctr"/>
           <a:lstStyle/>
           <a:p>
-            <a:pPr indent="0" marL="0">
+            <a:pPr marL="0" indent="0">
               <a:buNone/>
             </a:pPr>
             <a:r>
@@ -8620,7 +7892,7 @@
           <a:bodyPr wrap="square" rtlCol="0" anchor="ctr"/>
           <a:lstStyle/>
           <a:p>
-            <a:pPr indent="0" marL="0">
+            <a:pPr marL="0" indent="0">
               <a:buNone/>
             </a:pPr>
             <a:r>
@@ -8659,7 +7931,7 @@
           <a:bodyPr wrap="square" rtlCol="0" anchor="ctr"/>
           <a:lstStyle/>
           <a:p>
-            <a:pPr indent="0" marL="0">
+            <a:pPr marL="0" indent="0">
               <a:lnSpc>
                 <a:spcPts val="1300"/>
               </a:lnSpc>
@@ -8701,7 +7973,7 @@
           <a:bodyPr wrap="square" rtlCol="0" anchor="ctr"/>
           <a:lstStyle/>
           <a:p>
-            <a:pPr indent="0" marL="0">
+            <a:pPr marL="0" indent="0">
               <a:buNone/>
             </a:pPr>
             <a:r>
@@ -8745,7 +8017,7 @@
             <a:prstDash val="solid"/>
           </a:ln>
           <a:effectLst>
-            <a:outerShdw sx="100000" sy="100000" kx="0" ky="0" algn="bl" rotWithShape="0" blurRad="76200" dist="25400" dir="5400000">
+            <a:outerShdw blurRad="76200" dist="25400" dir="5400000" algn="bl" rotWithShape="0">
               <a:srgbClr val="0B1F33">
                 <a:alpha val="10000"/>
               </a:srgbClr>
@@ -8774,7 +8046,7 @@
           <a:bodyPr wrap="square" rtlCol="0" anchor="ctr"/>
           <a:lstStyle/>
           <a:p>
-            <a:pPr indent="0" marL="0">
+            <a:pPr marL="0" indent="0">
               <a:lnSpc>
                 <a:spcPts val="1700"/>
               </a:lnSpc>
@@ -8816,7 +8088,7 @@
           <a:bodyPr wrap="square" rtlCol="0" anchor="ctr"/>
           <a:lstStyle/>
           <a:p>
-            <a:pPr indent="0" marL="0">
+            <a:pPr marL="0" indent="0">
               <a:lnSpc>
                 <a:spcPts val="1600"/>
               </a:lnSpc>
@@ -8858,7 +8130,7 @@
           <a:bodyPr wrap="square" rtlCol="0" anchor="ctr"/>
           <a:lstStyle/>
           <a:p>
-            <a:pPr indent="0" marL="0">
+            <a:pPr marL="0" indent="0">
               <a:lnSpc>
                 <a:spcPts val="1500"/>
               </a:lnSpc>
@@ -8900,7 +8172,7 @@
           <a:bodyPr wrap="square" rtlCol="0" anchor="ctr"/>
           <a:lstStyle/>
           <a:p>
-            <a:pPr algn="r" indent="0" marL="0">
+            <a:pPr marL="0" indent="0" algn="r">
               <a:buNone/>
             </a:pPr>
             <a:r>
@@ -8939,7 +8211,7 @@
           <a:bodyPr wrap="square" rtlCol="0" anchor="ctr"/>
           <a:lstStyle/>
           <a:p>
-            <a:pPr indent="0" marL="0">
+            <a:pPr marL="0" indent="0">
               <a:buNone/>
             </a:pPr>
             <a:r>
@@ -9003,11 +8275,11 @@
           <a:bodyPr wrap="square" rtlCol="0" anchor="ctr"/>
           <a:lstStyle/>
           <a:p>
-            <a:pPr indent="0" marL="0">
-              <a:buNone/>
-            </a:pPr>
-            <a:r>
-              <a:rPr lang="en-US" sz="1200" b="1" spc="150" kern="0" dirty="0">
+            <a:pPr marL="0" indent="0">
+              <a:buNone/>
+            </a:pPr>
+            <a:r>
+              <a:rPr lang="en-US" sz="1200" b="1" kern="0" spc="150" dirty="0">
                 <a:solidFill>
                   <a:srgbClr val="17A2B8"/>
                 </a:solidFill>
@@ -9042,7 +8314,7 @@
           <a:bodyPr wrap="square" rtlCol="0" anchor="ctr"/>
           <a:lstStyle/>
           <a:p>
-            <a:pPr indent="0" marL="0">
+            <a:pPr marL="0" indent="0">
               <a:buNone/>
             </a:pPr>
             <a:r>
@@ -9086,7 +8358,7 @@
             <a:prstDash val="solid"/>
           </a:ln>
           <a:effectLst>
-            <a:outerShdw sx="100000" sy="100000" kx="0" ky="0" algn="bl" rotWithShape="0" blurRad="63500" dist="25400" dir="5400000">
+            <a:outerShdw blurRad="63500" dist="25400" dir="5400000" algn="bl" rotWithShape="0">
               <a:srgbClr val="0B1F33">
                 <a:alpha val="8000"/>
               </a:srgbClr>
@@ -9137,7 +8409,7 @@
           <a:bodyPr wrap="square" rtlCol="0" anchor="ctr"/>
           <a:lstStyle/>
           <a:p>
-            <a:pPr algn="ctr" indent="0" marL="0">
+            <a:pPr marL="0" indent="0" algn="ctr">
               <a:buNone/>
             </a:pPr>
             <a:r>
@@ -9176,7 +8448,7 @@
           <a:bodyPr wrap="square" rtlCol="0" anchor="ctr"/>
           <a:lstStyle/>
           <a:p>
-            <a:pPr indent="0" marL="0">
+            <a:pPr marL="0" indent="0">
               <a:buNone/>
             </a:pPr>
             <a:r>
@@ -9215,7 +8487,7 @@
           <a:bodyPr wrap="square" rtlCol="0" anchor="ctr"/>
           <a:lstStyle/>
           <a:p>
-            <a:pPr indent="0" marL="0">
+            <a:pPr marL="0" indent="0">
               <a:lnSpc>
                 <a:spcPts val="1250"/>
               </a:lnSpc>
@@ -9262,7 +8534,7 @@
             <a:prstDash val="solid"/>
           </a:ln>
           <a:effectLst>
-            <a:outerShdw sx="100000" sy="100000" kx="0" ky="0" algn="bl" rotWithShape="0" blurRad="63500" dist="25400" dir="5400000">
+            <a:outerShdw blurRad="63500" dist="25400" dir="5400000" algn="bl" rotWithShape="0">
               <a:srgbClr val="0B1F33">
                 <a:alpha val="8000"/>
               </a:srgbClr>
@@ -9313,7 +8585,7 @@
           <a:bodyPr wrap="square" rtlCol="0" anchor="ctr"/>
           <a:lstStyle/>
           <a:p>
-            <a:pPr algn="ctr" indent="0" marL="0">
+            <a:pPr marL="0" indent="0" algn="ctr">
               <a:buNone/>
             </a:pPr>
             <a:r>
@@ -9352,7 +8624,7 @@
           <a:bodyPr wrap="square" rtlCol="0" anchor="ctr"/>
           <a:lstStyle/>
           <a:p>
-            <a:pPr indent="0" marL="0">
+            <a:pPr marL="0" indent="0">
               <a:buNone/>
             </a:pPr>
             <a:r>
@@ -9391,7 +8663,7 @@
           <a:bodyPr wrap="square" rtlCol="0" anchor="ctr"/>
           <a:lstStyle/>
           <a:p>
-            <a:pPr indent="0" marL="0">
+            <a:pPr marL="0" indent="0">
               <a:lnSpc>
                 <a:spcPts val="1250"/>
               </a:lnSpc>
@@ -9438,7 +8710,7 @@
             <a:prstDash val="solid"/>
           </a:ln>
           <a:effectLst>
-            <a:outerShdw sx="100000" sy="100000" kx="0" ky="0" algn="bl" rotWithShape="0" blurRad="63500" dist="25400" dir="5400000">
+            <a:outerShdw blurRad="63500" dist="25400" dir="5400000" algn="bl" rotWithShape="0">
               <a:srgbClr val="0B1F33">
                 <a:alpha val="8000"/>
               </a:srgbClr>
@@ -9489,7 +8761,7 @@
           <a:bodyPr wrap="square" rtlCol="0" anchor="ctr"/>
           <a:lstStyle/>
           <a:p>
-            <a:pPr algn="ctr" indent="0" marL="0">
+            <a:pPr marL="0" indent="0" algn="ctr">
               <a:buNone/>
             </a:pPr>
             <a:r>
@@ -9528,7 +8800,7 @@
           <a:bodyPr wrap="square" rtlCol="0" anchor="ctr"/>
           <a:lstStyle/>
           <a:p>
-            <a:pPr indent="0" marL="0">
+            <a:pPr marL="0" indent="0">
               <a:buNone/>
             </a:pPr>
             <a:r>
@@ -9567,7 +8839,7 @@
           <a:bodyPr wrap="square" rtlCol="0" anchor="ctr"/>
           <a:lstStyle/>
           <a:p>
-            <a:pPr indent="0" marL="0">
+            <a:pPr marL="0" indent="0">
               <a:lnSpc>
                 <a:spcPts val="1250"/>
               </a:lnSpc>
@@ -9614,7 +8886,7 @@
             <a:prstDash val="solid"/>
           </a:ln>
           <a:effectLst>
-            <a:outerShdw sx="100000" sy="100000" kx="0" ky="0" algn="bl" rotWithShape="0" blurRad="63500" dist="25400" dir="5400000">
+            <a:outerShdw blurRad="63500" dist="25400" dir="5400000" algn="bl" rotWithShape="0">
               <a:srgbClr val="0B1F33">
                 <a:alpha val="8000"/>
               </a:srgbClr>
@@ -9665,7 +8937,7 @@
           <a:bodyPr wrap="square" rtlCol="0" anchor="ctr"/>
           <a:lstStyle/>
           <a:p>
-            <a:pPr algn="ctr" indent="0" marL="0">
+            <a:pPr marL="0" indent="0" algn="ctr">
               <a:buNone/>
             </a:pPr>
             <a:r>
@@ -9704,7 +8976,7 @@
           <a:bodyPr wrap="square" rtlCol="0" anchor="ctr"/>
           <a:lstStyle/>
           <a:p>
-            <a:pPr indent="0" marL="0">
+            <a:pPr marL="0" indent="0">
               <a:buNone/>
             </a:pPr>
             <a:r>
@@ -9743,7 +9015,7 @@
           <a:bodyPr wrap="square" rtlCol="0" anchor="ctr"/>
           <a:lstStyle/>
           <a:p>
-            <a:pPr indent="0" marL="0">
+            <a:pPr marL="0" indent="0">
               <a:lnSpc>
                 <a:spcPts val="1250"/>
               </a:lnSpc>
@@ -9790,7 +9062,7 @@
             <a:prstDash val="solid"/>
           </a:ln>
           <a:effectLst>
-            <a:outerShdw sx="100000" sy="100000" kx="0" ky="0" algn="bl" rotWithShape="0" blurRad="63500" dist="25400" dir="5400000">
+            <a:outerShdw blurRad="63500" dist="25400" dir="5400000" algn="bl" rotWithShape="0">
               <a:srgbClr val="0B1F33">
                 <a:alpha val="8000"/>
               </a:srgbClr>
@@ -9841,7 +9113,7 @@
           <a:bodyPr wrap="square" rtlCol="0" anchor="ctr"/>
           <a:lstStyle/>
           <a:p>
-            <a:pPr algn="ctr" indent="0" marL="0">
+            <a:pPr marL="0" indent="0" algn="ctr">
               <a:buNone/>
             </a:pPr>
             <a:r>
@@ -9880,7 +9152,7 @@
           <a:bodyPr wrap="square" rtlCol="0" anchor="ctr"/>
           <a:lstStyle/>
           <a:p>
-            <a:pPr indent="0" marL="0">
+            <a:pPr marL="0" indent="0">
               <a:buNone/>
             </a:pPr>
             <a:r>
@@ -9919,7 +9191,7 @@
           <a:bodyPr wrap="square" rtlCol="0" anchor="ctr"/>
           <a:lstStyle/>
           <a:p>
-            <a:pPr indent="0" marL="0">
+            <a:pPr marL="0" indent="0">
               <a:lnSpc>
                 <a:spcPts val="1250"/>
               </a:lnSpc>
@@ -9966,7 +9238,7 @@
             <a:prstDash val="solid"/>
           </a:ln>
           <a:effectLst>
-            <a:outerShdw sx="100000" sy="100000" kx="0" ky="0" algn="bl" rotWithShape="0" blurRad="63500" dist="25400" dir="5400000">
+            <a:outerShdw blurRad="63500" dist="25400" dir="5400000" algn="bl" rotWithShape="0">
               <a:srgbClr val="0B1F33">
                 <a:alpha val="8000"/>
               </a:srgbClr>
@@ -10017,7 +9289,7 @@
           <a:bodyPr wrap="square" rtlCol="0" anchor="ctr"/>
           <a:lstStyle/>
           <a:p>
-            <a:pPr algn="ctr" indent="0" marL="0">
+            <a:pPr marL="0" indent="0" algn="ctr">
               <a:buNone/>
             </a:pPr>
             <a:r>
@@ -10056,7 +9328,7 @@
           <a:bodyPr wrap="square" rtlCol="0" anchor="ctr"/>
           <a:lstStyle/>
           <a:p>
-            <a:pPr indent="0" marL="0">
+            <a:pPr marL="0" indent="0">
               <a:buNone/>
             </a:pPr>
             <a:r>
@@ -10095,7 +9367,7 @@
           <a:bodyPr wrap="square" rtlCol="0" anchor="ctr"/>
           <a:lstStyle/>
           <a:p>
-            <a:pPr indent="0" marL="0">
+            <a:pPr marL="0" indent="0">
               <a:lnSpc>
                 <a:spcPts val="1250"/>
               </a:lnSpc>
@@ -10137,7 +9409,7 @@
           <a:bodyPr wrap="square" rtlCol="0" anchor="ctr"/>
           <a:lstStyle/>
           <a:p>
-            <a:pPr algn="r" indent="0" marL="0">
+            <a:pPr marL="0" indent="0" algn="r">
               <a:buNone/>
             </a:pPr>
             <a:r>
@@ -10176,7 +9448,7 @@
           <a:bodyPr wrap="square" rtlCol="0" anchor="ctr"/>
           <a:lstStyle/>
           <a:p>
-            <a:pPr indent="0" marL="0">
+            <a:pPr marL="0" indent="0">
               <a:buNone/>
             </a:pPr>
             <a:r>
@@ -10240,11 +9512,11 @@
           <a:bodyPr wrap="square" rtlCol="0" anchor="ctr"/>
           <a:lstStyle/>
           <a:p>
-            <a:pPr indent="0" marL="0">
-              <a:buNone/>
-            </a:pPr>
-            <a:r>
-              <a:rPr lang="en-US" sz="1200" b="1" spc="150" kern="0" dirty="0">
+            <a:pPr marL="0" indent="0">
+              <a:buNone/>
+            </a:pPr>
+            <a:r>
+              <a:rPr lang="en-US" sz="1200" b="1" kern="0" spc="150" dirty="0">
                 <a:solidFill>
                   <a:srgbClr val="17A2B8"/>
                 </a:solidFill>
@@ -10279,7 +9551,7 @@
           <a:bodyPr wrap="square" rtlCol="0" anchor="ctr"/>
           <a:lstStyle/>
           <a:p>
-            <a:pPr indent="0" marL="0">
+            <a:pPr marL="0" indent="0">
               <a:buNone/>
             </a:pPr>
             <a:r>
@@ -10318,7 +9590,7 @@
           <a:bodyPr wrap="square" rtlCol="0" anchor="ctr"/>
           <a:lstStyle/>
           <a:p>
-            <a:pPr indent="0" marL="0">
+            <a:pPr marL="0" indent="0">
               <a:lnSpc>
                 <a:spcPts val="1800"/>
               </a:lnSpc>
@@ -10380,7 +9652,7 @@
           <a:bodyPr wrap="square" rtlCol="0" anchor="ctr"/>
           <a:lstStyle/>
           <a:p>
-            <a:pPr algn="ctr" indent="0" marL="0">
+            <a:pPr marL="0" indent="0" algn="ctr">
               <a:buNone/>
             </a:pPr>
             <a:r>
@@ -10439,7 +9711,7 @@
           <a:bodyPr wrap="square" rtlCol="0" anchor="ctr"/>
           <a:lstStyle/>
           <a:p>
-            <a:pPr indent="0" marL="0">
+            <a:pPr marL="0" indent="0">
               <a:buNone/>
             </a:pPr>
             <a:r>
@@ -10478,7 +9750,7 @@
           <a:bodyPr wrap="square" rtlCol="0" anchor="ctr"/>
           <a:lstStyle/>
           <a:p>
-            <a:pPr indent="0" marL="0">
+            <a:pPr marL="0" indent="0">
               <a:lnSpc>
                 <a:spcPts val="1400"/>
               </a:lnSpc>
@@ -10540,7 +9812,7 @@
           <a:bodyPr wrap="square" rtlCol="0" anchor="ctr"/>
           <a:lstStyle/>
           <a:p>
-            <a:pPr algn="ctr" indent="0" marL="0">
+            <a:pPr marL="0" indent="0" algn="ctr">
               <a:buNone/>
             </a:pPr>
             <a:r>
@@ -10599,7 +9871,7 @@
           <a:bodyPr wrap="square" rtlCol="0" anchor="ctr"/>
           <a:lstStyle/>
           <a:p>
-            <a:pPr indent="0" marL="0">
+            <a:pPr marL="0" indent="0">
               <a:buNone/>
             </a:pPr>
             <a:r>
@@ -10638,7 +9910,7 @@
           <a:bodyPr wrap="square" rtlCol="0" anchor="ctr"/>
           <a:lstStyle/>
           <a:p>
-            <a:pPr indent="0" marL="0">
+            <a:pPr marL="0" indent="0">
               <a:lnSpc>
                 <a:spcPts val="1400"/>
               </a:lnSpc>
@@ -10700,7 +9972,7 @@
           <a:bodyPr wrap="square" rtlCol="0" anchor="ctr"/>
           <a:lstStyle/>
           <a:p>
-            <a:pPr algn="ctr" indent="0" marL="0">
+            <a:pPr marL="0" indent="0" algn="ctr">
               <a:buNone/>
             </a:pPr>
             <a:r>
@@ -10759,7 +10031,7 @@
           <a:bodyPr wrap="square" rtlCol="0" anchor="ctr"/>
           <a:lstStyle/>
           <a:p>
-            <a:pPr indent="0" marL="0">
+            <a:pPr marL="0" indent="0">
               <a:buNone/>
             </a:pPr>
             <a:r>
@@ -10798,7 +10070,7 @@
           <a:bodyPr wrap="square" rtlCol="0" anchor="ctr"/>
           <a:lstStyle/>
           <a:p>
-            <a:pPr indent="0" marL="0">
+            <a:pPr marL="0" indent="0">
               <a:lnSpc>
                 <a:spcPts val="1400"/>
               </a:lnSpc>
@@ -10860,7 +10132,7 @@
           <a:bodyPr wrap="square" rtlCol="0" anchor="ctr"/>
           <a:lstStyle/>
           <a:p>
-            <a:pPr algn="ctr" indent="0" marL="0">
+            <a:pPr marL="0" indent="0" algn="ctr">
               <a:buNone/>
             </a:pPr>
             <a:r>
@@ -10899,7 +10171,7 @@
           <a:bodyPr wrap="square" rtlCol="0" anchor="ctr"/>
           <a:lstStyle/>
           <a:p>
-            <a:pPr indent="0" marL="0">
+            <a:pPr marL="0" indent="0">
               <a:buNone/>
             </a:pPr>
             <a:r>
@@ -10938,7 +10210,7 @@
           <a:bodyPr wrap="square" rtlCol="0" anchor="ctr"/>
           <a:lstStyle/>
           <a:p>
-            <a:pPr indent="0" marL="0">
+            <a:pPr marL="0" indent="0">
               <a:lnSpc>
                 <a:spcPts val="1400"/>
               </a:lnSpc>
@@ -10980,7 +10252,7 @@
           <a:bodyPr wrap="square" rtlCol="0" anchor="ctr"/>
           <a:lstStyle/>
           <a:p>
-            <a:pPr algn="r" indent="0" marL="0">
+            <a:pPr marL="0" indent="0" algn="r">
               <a:buNone/>
             </a:pPr>
             <a:r>
@@ -11019,7 +10291,7 @@
           <a:bodyPr wrap="square" rtlCol="0" anchor="ctr"/>
           <a:lstStyle/>
           <a:p>
-            <a:pPr indent="0" marL="0">
+            <a:pPr marL="0" indent="0">
               <a:buNone/>
             </a:pPr>
             <a:r>
@@ -11338,4 +10610,319 @@
     </a:ext>
   </a:extLst>
 </a:theme>
+</file>
+
+<file path=ppt/theme/theme2.xml><?xml version="1.0" encoding="utf-8"?>
+<a:theme xmlns:a="http://schemas.openxmlformats.org/drawingml/2006/main" name="Thème Office">
+  <a:themeElements>
+    <a:clrScheme name="Office">
+      <a:dk1>
+        <a:sysClr val="windowText" lastClr="000000"/>
+      </a:dk1>
+      <a:lt1>
+        <a:sysClr val="window" lastClr="FFFFFF"/>
+      </a:lt1>
+      <a:dk2>
+        <a:srgbClr val="0E2841"/>
+      </a:dk2>
+      <a:lt2>
+        <a:srgbClr val="E8E8E8"/>
+      </a:lt2>
+      <a:accent1>
+        <a:srgbClr val="156082"/>
+      </a:accent1>
+      <a:accent2>
+        <a:srgbClr val="E97132"/>
+      </a:accent2>
+      <a:accent3>
+        <a:srgbClr val="196B24"/>
+      </a:accent3>
+      <a:accent4>
+        <a:srgbClr val="0F9ED5"/>
+      </a:accent4>
+      <a:accent5>
+        <a:srgbClr val="A02B93"/>
+      </a:accent5>
+      <a:accent6>
+        <a:srgbClr val="4EA72E"/>
+      </a:accent6>
+      <a:hlink>
+        <a:srgbClr val="467886"/>
+      </a:hlink>
+      <a:folHlink>
+        <a:srgbClr val="96607D"/>
+      </a:folHlink>
+    </a:clrScheme>
+    <a:fontScheme name="Office">
+      <a:majorFont>
+        <a:latin typeface="Aptos Display" panose="02110004020202020204"/>
+        <a:ea typeface=""/>
+        <a:cs typeface=""/>
+        <a:font script="Jpan" typeface="游ゴシック Light"/>
+        <a:font script="Hang" typeface="맑은 고딕"/>
+        <a:font script="Hans" typeface="等线 Light"/>
+        <a:font script="Hant" typeface="新細明體"/>
+        <a:font script="Arab" typeface="Times New Roman"/>
+        <a:font script="Hebr" typeface="Times New Roman"/>
+        <a:font script="Thai" typeface="Angsana New"/>
+        <a:font script="Ethi" typeface="Nyala"/>
+        <a:font script="Beng" typeface="Vrinda"/>
+        <a:font script="Gujr" typeface="Shruti"/>
+        <a:font script="Khmr" typeface="MoolBoran"/>
+        <a:font script="Knda" typeface="Tunga"/>
+        <a:font script="Guru" typeface="Raavi"/>
+        <a:font script="Cans" typeface="Euphemia"/>
+        <a:font script="Cher" typeface="Plantagenet Cherokee"/>
+        <a:font script="Yiii" typeface="Microsoft Yi Baiti"/>
+        <a:font script="Tibt" typeface="Microsoft Himalaya"/>
+        <a:font script="Thaa" typeface="MV Boli"/>
+        <a:font script="Deva" typeface="Mangal"/>
+        <a:font script="Telu" typeface="Gautami"/>
+        <a:font script="Taml" typeface="Latha"/>
+        <a:font script="Syrc" typeface="Estrangelo Edessa"/>
+        <a:font script="Orya" typeface="Kalinga"/>
+        <a:font script="Mlym" typeface="Kartika"/>
+        <a:font script="Laoo" typeface="DokChampa"/>
+        <a:font script="Sinh" typeface="Iskoola Pota"/>
+        <a:font script="Mong" typeface="Mongolian Baiti"/>
+        <a:font script="Viet" typeface="Times New Roman"/>
+        <a:font script="Uigh" typeface="Microsoft Uighur"/>
+        <a:font script="Geor" typeface="Sylfaen"/>
+        <a:font script="Armn" typeface="Arial"/>
+        <a:font script="Bugi" typeface="Leelawadee UI"/>
+        <a:font script="Bopo" typeface="Microsoft JhengHei"/>
+        <a:font script="Java" typeface="Javanese Text"/>
+        <a:font script="Lisu" typeface="Segoe UI"/>
+        <a:font script="Mymr" typeface="Myanmar Text"/>
+        <a:font script="Nkoo" typeface="Ebrima"/>
+        <a:font script="Olck" typeface="Nirmala UI"/>
+        <a:font script="Osma" typeface="Ebrima"/>
+        <a:font script="Phag" typeface="Phagspa"/>
+        <a:font script="Syrn" typeface="Estrangelo Edessa"/>
+        <a:font script="Syrj" typeface="Estrangelo Edessa"/>
+        <a:font script="Syre" typeface="Estrangelo Edessa"/>
+        <a:font script="Sora" typeface="Nirmala UI"/>
+        <a:font script="Tale" typeface="Microsoft Tai Le"/>
+        <a:font script="Talu" typeface="Microsoft New Tai Lue"/>
+        <a:font script="Tfng" typeface="Ebrima"/>
+      </a:majorFont>
+      <a:minorFont>
+        <a:latin typeface="Aptos" panose="02110004020202020204"/>
+        <a:ea typeface=""/>
+        <a:cs typeface=""/>
+        <a:font script="Jpan" typeface="游ゴシック"/>
+        <a:font script="Hang" typeface="맑은 고딕"/>
+        <a:font script="Hans" typeface="等线"/>
+        <a:font script="Hant" typeface="新細明體"/>
+        <a:font script="Arab" typeface="Arial"/>
+        <a:font script="Hebr" typeface="Arial"/>
+        <a:font script="Thai" typeface="Cordia New"/>
+        <a:font script="Ethi" typeface="Nyala"/>
+        <a:font script="Beng" typeface="Vrinda"/>
+        <a:font script="Gujr" typeface="Shruti"/>
+        <a:font script="Khmr" typeface="DaunPenh"/>
+        <a:font script="Knda" typeface="Tunga"/>
+        <a:font script="Guru" typeface="Raavi"/>
+        <a:font script="Cans" typeface="Euphemia"/>
+        <a:font script="Cher" typeface="Plantagenet Cherokee"/>
+        <a:font script="Yiii" typeface="Microsoft Yi Baiti"/>
+        <a:font script="Tibt" typeface="Microsoft Himalaya"/>
+        <a:font script="Thaa" typeface="MV Boli"/>
+        <a:font script="Deva" typeface="Mangal"/>
+        <a:font script="Telu" typeface="Gautami"/>
+        <a:font script="Taml" typeface="Latha"/>
+        <a:font script="Syrc" typeface="Estrangelo Edessa"/>
+        <a:font script="Orya" typeface="Kalinga"/>
+        <a:font script="Mlym" typeface="Kartika"/>
+        <a:font script="Laoo" typeface="DokChampa"/>
+        <a:font script="Sinh" typeface="Iskoola Pota"/>
+        <a:font script="Mong" typeface="Mongolian Baiti"/>
+        <a:font script="Viet" typeface="Arial"/>
+        <a:font script="Uigh" typeface="Microsoft Uighur"/>
+        <a:font script="Geor" typeface="Sylfaen"/>
+        <a:font script="Armn" typeface="Arial"/>
+        <a:font script="Bugi" typeface="Leelawadee UI"/>
+        <a:font script="Bopo" typeface="Microsoft JhengHei"/>
+        <a:font script="Java" typeface="Javanese Text"/>
+        <a:font script="Lisu" typeface="Segoe UI"/>
+        <a:font script="Mymr" typeface="Myanmar Text"/>
+        <a:font script="Nkoo" typeface="Ebrima"/>
+        <a:font script="Olck" typeface="Nirmala UI"/>
+        <a:font script="Osma" typeface="Ebrima"/>
+        <a:font script="Phag" typeface="Phagspa"/>
+        <a:font script="Syrn" typeface="Estrangelo Edessa"/>
+        <a:font script="Syrj" typeface="Estrangelo Edessa"/>
+        <a:font script="Syre" typeface="Estrangelo Edessa"/>
+        <a:font script="Sora" typeface="Nirmala UI"/>
+        <a:font script="Tale" typeface="Microsoft Tai Le"/>
+        <a:font script="Talu" typeface="Microsoft New Tai Lue"/>
+        <a:font script="Tfng" typeface="Ebrima"/>
+      </a:minorFont>
+    </a:fontScheme>
+    <a:fmtScheme name="Office">
+      <a:fillStyleLst>
+        <a:solidFill>
+          <a:schemeClr val="phClr"/>
+        </a:solidFill>
+        <a:gradFill rotWithShape="1">
+          <a:gsLst>
+            <a:gs pos="0">
+              <a:schemeClr val="phClr">
+                <a:lumMod val="110000"/>
+                <a:satMod val="105000"/>
+                <a:tint val="67000"/>
+              </a:schemeClr>
+            </a:gs>
+            <a:gs pos="50000">
+              <a:schemeClr val="phClr">
+                <a:lumMod val="105000"/>
+                <a:satMod val="103000"/>
+                <a:tint val="73000"/>
+              </a:schemeClr>
+            </a:gs>
+            <a:gs pos="100000">
+              <a:schemeClr val="phClr">
+                <a:lumMod val="105000"/>
+                <a:satMod val="109000"/>
+                <a:tint val="81000"/>
+              </a:schemeClr>
+            </a:gs>
+          </a:gsLst>
+          <a:lin ang="5400000" scaled="0"/>
+        </a:gradFill>
+        <a:gradFill rotWithShape="1">
+          <a:gsLst>
+            <a:gs pos="0">
+              <a:schemeClr val="phClr">
+                <a:satMod val="103000"/>
+                <a:lumMod val="102000"/>
+                <a:tint val="94000"/>
+              </a:schemeClr>
+            </a:gs>
+            <a:gs pos="50000">
+              <a:schemeClr val="phClr">
+                <a:satMod val="110000"/>
+                <a:lumMod val="100000"/>
+                <a:shade val="100000"/>
+              </a:schemeClr>
+            </a:gs>
+            <a:gs pos="100000">
+              <a:schemeClr val="phClr">
+                <a:lumMod val="99000"/>
+                <a:satMod val="120000"/>
+                <a:shade val="78000"/>
+              </a:schemeClr>
+            </a:gs>
+          </a:gsLst>
+          <a:lin ang="5400000" scaled="0"/>
+        </a:gradFill>
+      </a:fillStyleLst>
+      <a:lnStyleLst>
+        <a:ln w="12700" cap="flat" cmpd="sng" algn="ctr">
+          <a:solidFill>
+            <a:schemeClr val="phClr"/>
+          </a:solidFill>
+          <a:prstDash val="solid"/>
+          <a:miter lim="800000"/>
+        </a:ln>
+        <a:ln w="19050" cap="flat" cmpd="sng" algn="ctr">
+          <a:solidFill>
+            <a:schemeClr val="phClr"/>
+          </a:solidFill>
+          <a:prstDash val="solid"/>
+          <a:miter lim="800000"/>
+        </a:ln>
+        <a:ln w="25400" cap="flat" cmpd="sng" algn="ctr">
+          <a:solidFill>
+            <a:schemeClr val="phClr"/>
+          </a:solidFill>
+          <a:prstDash val="solid"/>
+          <a:miter lim="800000"/>
+        </a:ln>
+      </a:lnStyleLst>
+      <a:effectStyleLst>
+        <a:effectStyle>
+          <a:effectLst/>
+        </a:effectStyle>
+        <a:effectStyle>
+          <a:effectLst/>
+        </a:effectStyle>
+        <a:effectStyle>
+          <a:effectLst>
+            <a:outerShdw blurRad="57150" dist="19050" dir="5400000" algn="ctr" rotWithShape="0">
+              <a:srgbClr val="000000">
+                <a:alpha val="63000"/>
+              </a:srgbClr>
+            </a:outerShdw>
+          </a:effectLst>
+        </a:effectStyle>
+      </a:effectStyleLst>
+      <a:bgFillStyleLst>
+        <a:solidFill>
+          <a:schemeClr val="phClr"/>
+        </a:solidFill>
+        <a:solidFill>
+          <a:schemeClr val="phClr">
+            <a:tint val="95000"/>
+            <a:satMod val="170000"/>
+          </a:schemeClr>
+        </a:solidFill>
+        <a:gradFill rotWithShape="1">
+          <a:gsLst>
+            <a:gs pos="0">
+              <a:schemeClr val="phClr">
+                <a:tint val="93000"/>
+                <a:satMod val="150000"/>
+                <a:shade val="98000"/>
+                <a:lumMod val="102000"/>
+              </a:schemeClr>
+            </a:gs>
+            <a:gs pos="50000">
+              <a:schemeClr val="phClr">
+                <a:tint val="98000"/>
+                <a:satMod val="130000"/>
+                <a:shade val="90000"/>
+                <a:lumMod val="103000"/>
+              </a:schemeClr>
+            </a:gs>
+            <a:gs pos="100000">
+              <a:schemeClr val="phClr">
+                <a:shade val="63000"/>
+                <a:satMod val="120000"/>
+              </a:schemeClr>
+            </a:gs>
+          </a:gsLst>
+          <a:lin ang="5400000" scaled="0"/>
+        </a:gradFill>
+      </a:bgFillStyleLst>
+    </a:fmtScheme>
+  </a:themeElements>
+  <a:objectDefaults>
+    <a:lnDef>
+      <a:spPr/>
+      <a:bodyPr/>
+      <a:lstStyle/>
+      <a:style>
+        <a:lnRef idx="2">
+          <a:schemeClr val="accent1"/>
+        </a:lnRef>
+        <a:fillRef idx="0">
+          <a:schemeClr val="accent1"/>
+        </a:fillRef>
+        <a:effectRef idx="1">
+          <a:schemeClr val="accent1"/>
+        </a:effectRef>
+        <a:fontRef idx="minor">
+          <a:schemeClr val="tx1"/>
+        </a:fontRef>
+      </a:style>
+    </a:lnDef>
+  </a:objectDefaults>
+  <a:extraClrSchemeLst/>
+  <a:extLst>
+    <a:ext uri="{05A4C25C-085E-4340-85A3-A5531E510DB2}">
+      <thm15:themeFamily xmlns:thm15="http://schemas.microsoft.com/office/thememl/2012/main" name="Office Theme" id="{2E142A2C-CD16-42D6-873A-C26D2A0506FA}" vid="{1BDDFF52-6CD6-40A5-AB3C-68EB2F1E4D0A}"/>
+    </a:ext>
+  </a:extLst>
+</a:theme>
 </file>